--- a/06_notebooks/dissertation_plan [Autosaved].pptx
+++ b/06_notebooks/dissertation_plan [Autosaved].pptx
@@ -25,6 +25,8 @@
     <p:sldId id="262" r:id="rId19"/>
     <p:sldId id="268" r:id="rId20"/>
     <p:sldId id="269" r:id="rId21"/>
+    <p:sldId id="276" r:id="rId22"/>
+    <p:sldId id="277" r:id="rId23"/>
   </p:sldIdLst>
   <p:sldSz cx="12192000" cy="6858000"/>
   <p:notesSz cx="6858000" cy="9144000"/>
@@ -129,6 +131,762 @@
     </p:ext>
   </p:extLst>
 </p:presentation>
+</file>
+
+<file path=ppt/ink/ink1.xml><?xml version="1.0" encoding="utf-8"?>
+<inkml:ink xmlns:inkml="http://www.w3.org/2003/InkML">
+  <inkml:definitions>
+    <inkml:context xml:id="ctx0">
+      <inkml:inkSource xml:id="inkSrc0">
+        <inkml:traceFormat>
+          <inkml:channel name="X" type="integer" min="-2.14748E9" max="2.14748E9" units="cm"/>
+          <inkml:channel name="Y" type="integer" min="-2.14748E9" max="2.14748E9" units="cm"/>
+          <inkml:channel name="F" type="integer" max="32767" units="dev"/>
+        </inkml:traceFormat>
+        <inkml:channelProperties>
+          <inkml:channelProperty channel="X" name="resolution" value="1000" units="1/cm"/>
+          <inkml:channelProperty channel="Y" name="resolution" value="1000" units="1/cm"/>
+          <inkml:channelProperty channel="F" name="resolution" value="0" units="1/dev"/>
+        </inkml:channelProperties>
+      </inkml:inkSource>
+      <inkml:timestamp xml:id="ts0" timeString="2025-06-24T19:50:17.002"/>
+    </inkml:context>
+    <inkml:brush xml:id="br0">
+      <inkml:brushProperty name="width" value="0.035" units="cm"/>
+      <inkml:brushProperty name="height" value="0.035" units="cm"/>
+    </inkml:brush>
+  </inkml:definitions>
+  <inkml:trace contextRef="#ctx0" brushRef="#br0">1 276 24575,'28'-1'0,"1"-2"0,51-11 0,-73 12 0,9 0 0,0 0 0,0 1 0,1 1 0,-1 0 0,0 1 0,0 1 0,0 0 0,-1 1 0,21 7 0,-15-3 0,-1 0 0,0 2 0,-1 0 0,1 2 0,-2 0 0,24 18 0,-28-17 0,0 1 0,-1 0 0,-1 1 0,22 31 0,-32-42 0,0 0 0,-1 0 0,1 0 0,-1 0 0,1 0 0,-1 1 0,0-1 0,0 0 0,-1 1 0,1-1 0,-1 1 0,0-1 0,0 1 0,0 6 0,-1-8 0,1 0 0,-1 0 0,1 0 0,-1 0 0,0 0 0,0 0 0,0 0 0,0 0 0,0 0 0,-1 0 0,1-1 0,-1 1 0,1 0 0,-1-1 0,1 0 0,-1 1 0,0-1 0,0 0 0,1 0 0,-1 0 0,0 0 0,0 0 0,0 0 0,0 0 0,-3 0 0,-7 2 0,1-1 0,-1-1 0,0 0 0,1-1 0,-1 0 0,0 0 0,1-1 0,-1-1 0,0 0 0,1-1 0,-19-6 0,14 3 0,1-1 0,-1 0 0,1-1 0,1-1 0,-1 0 0,2-1 0,-20-17 0,-131-145 0,145 151 0,11 11 0,0-1 0,1 0 0,0-1 0,1 1 0,0-1 0,1 0 0,0-1 0,1 1 0,1-1 0,0 0 0,-2-18 0,4 26 0,1 0 0,0 0 0,0 0 0,0 0 0,0 1 0,1-1 0,0 0 0,0 0 0,0 0 0,3-6 0,-3 9 0,0-1 0,0 1 0,0 0 0,1 0 0,-1 0 0,1 0 0,0 0 0,-1 0 0,1 1 0,0-1 0,0 0 0,0 1 0,0-1 0,1 1 0,-1 0 0,0 0 0,1 0 0,-1 0 0,0 0 0,1 0 0,3 0 0,0 0 0,0 0 0,1 1 0,-1 0 0,1 0 0,-1 0 0,1 1 0,-1 0 0,0 0 0,1 1 0,-1-1 0,0 1 0,0 1 0,0-1 0,0 1 0,8 5 0,51 23 0,-48-24 0,0 0 0,-1 2 0,0 0 0,22 16 0,-33-20 0,0-1 0,-1 1 0,0 0 0,0 0 0,0 0 0,-1 1 0,0-1 0,0 1 0,0 0 0,-1 0 0,3 6 0,-3-2 0,1-1 0,-2 1 0,1-1 0,-1 1 0,0 0 0,-2 15 0,1-23 0,-1 1 0,1-1 0,-1 0 0,1 0 0,-1 0 0,0 0 0,0 0 0,0 0 0,0-1 0,0 1 0,-1 0 0,1 0 0,0-1 0,-1 1 0,1-1 0,-1 1 0,0-1 0,1 0 0,-1 1 0,-2 0 0,3-2 0,0 1 0,-1 0 0,1-1 0,0 1 0,0-1 0,-1 0 0,1 1 0,0-1 0,0 0 0,-1 0 0,1 0 0,0 0 0,-1 0 0,1 0 0,0 0 0,-1 0 0,1 0 0,0-1 0,0 1 0,-1 0 0,1-1 0,0 1 0,0-1 0,0 0 0,-1 1 0,1-1 0,0 0 0,0 0 0,0 0 0,0 0 0,0 0 0,1 0 0,-2-1 0,1 2 0,1-1 0,-1 0 0,1 0 0,-1 0 0,1 1 0,-1-1 0,1 0 0,0 0 0,-1 0 0,1 0 0,0 0 0,0 0 0,-1 0 0,1 0 0,0 0 0,0 0 0,0 0 0,0 1 0,0-1 0,1 0 0,-1 0 0,1-2 0,-1 2 0,1-1 0,0 1 0,0 0 0,0-1 0,0 1 0,0 0 0,0 0 0,1 0 0,-1 0 0,0 0 0,1 0 0,1-1 0,2-1 0,1 1 0,0 0 0,-1 0 0,1 0 0,0 1 0,8-2 0,-10 3 0,0 0 0,0 0 0,0 0 0,-1 0 0,1 1 0,0 0 0,0 0 0,0 0 0,0 0 0,-1 0 0,1 1 0,-1 0 0,7 3 0,-4 0 0,1 0 0,-1 0 0,-1 0 0,1 1 0,-1 0 0,5 6 0,-8-8 0,0-1 0,0 0 0,0 1 0,-1-1 0,1 1 0,-1-1 0,0 1 0,0 0 0,0-1 0,0 1 0,0 5 0,-1-6 0,0-1 0,0 1 0,0-1 0,-1 1 0,1-1 0,-1 1 0,1-1 0,-1 0 0,0 1 0,0-1 0,0 0 0,0 1 0,0-1 0,0 0 0,-1 0 0,1 0 0,-1 0 0,-2 2 0,-2 2 0,-2 0 0,1 0 0,-1-1 0,1 0 0,-2 0 0,1-1 0,0 0 0,-1 0 0,0-1 0,1 0 0,-1-1 0,-1 0 0,1 0 0,0-1 0,0 0 0,-1-1 0,1 0 0,-15-2 0,21 1 0,0 0 0,0 0 0,0 0 0,0 0 0,0 0 0,0-1 0,0 0 0,1 1 0,-1-1 0,0 0 0,1 0 0,0-1 0,-1 1 0,-1-3 0,1 1 0,0 0 0,0-1 0,1 1 0,-1-1 0,1 0 0,0 0 0,0 1 0,-1-10 0,2 10 0,0-1 0,0 0 0,1 1 0,0-1 0,0 0 0,0 1 0,1-1 0,-1 0 0,3-7 0,-2 10 0,0-1 0,0 0 0,0 1 0,0-1 0,1 1 0,-1-1 0,1 1 0,0 0 0,-1 0 0,1 0 0,0 0 0,0 0 0,0 0 0,1 0 0,-1 0 0,3-1 0,-2 2 0,1 0 0,-1 0 0,0 0 0,0 0 0,1 0 0,-1 1 0,0-1 0,1 1 0,-1 0 0,0 0 0,1 0 0,-1 1 0,0-1 0,1 1 0,-1 0 0,0 0 0,0 0 0,0 0 0,6 3 0,-2 0 0,0 0 0,0 1 0,-1-1 0,0 1 0,1 1 0,-2-1 0,8 8 0,-11-9 0,1-1 0,-1 1 0,0 0 0,0 0 0,0 0 0,-1 0 0,0 0 0,1 0 0,-1 0 0,-1 1 0,2 7 0,-2 1 0,0 1 0,-2 20 0,2-33 0,-1 1 0,1 0 0,0 0 0,-1 0 0,1-1 0,-1 1 0,0 0 0,0-1 0,1 1 0,-1 0 0,0-1 0,0 1 0,-1-1 0,1 0 0,0 1 0,0-1 0,-1 0 0,-2 2 0,2-1 0,-1-1 0,1 0 0,-1 0 0,1 0 0,-1 0 0,0 0 0,0-1 0,1 1 0,-1-1 0,0 1 0,-4-1 0,3 0 0,-1-1 0,0 1 0,0-1 0,0 0 0,0 0 0,1 0 0,-1-1 0,0 0 0,1 0 0,-1 0 0,1 0 0,0-1 0,-7-5 0,7 5 10,1-1 0,-1 0 0,1 0 0,0 0 0,0 0 0,1-1 0,-1 1 0,1-1 0,0 1 0,0-1 0,-1-6 0,1 1-307,1 0 0,0 0 0,0 0 0,1-17 0,1 13-6529</inkml:trace>
+</inkml:ink>
+</file>
+
+<file path=ppt/ink/ink10.xml><?xml version="1.0" encoding="utf-8"?>
+<inkml:ink xmlns:inkml="http://www.w3.org/2003/InkML">
+  <inkml:definitions>
+    <inkml:context xml:id="ctx0">
+      <inkml:inkSource xml:id="inkSrc0">
+        <inkml:traceFormat>
+          <inkml:channel name="X" type="integer" min="-2.14748E9" max="2.14748E9" units="cm"/>
+          <inkml:channel name="Y" type="integer" min="-2.14748E9" max="2.14748E9" units="cm"/>
+          <inkml:channel name="F" type="integer" max="32767" units="dev"/>
+        </inkml:traceFormat>
+        <inkml:channelProperties>
+          <inkml:channelProperty channel="X" name="resolution" value="1000" units="1/cm"/>
+          <inkml:channelProperty channel="Y" name="resolution" value="1000" units="1/cm"/>
+          <inkml:channelProperty channel="F" name="resolution" value="0" units="1/dev"/>
+        </inkml:channelProperties>
+      </inkml:inkSource>
+      <inkml:timestamp xml:id="ts0" timeString="2025-06-24T19:50:32.209"/>
+    </inkml:context>
+    <inkml:brush xml:id="br0">
+      <inkml:brushProperty name="width" value="0.035" units="cm"/>
+      <inkml:brushProperty name="height" value="0.035" units="cm"/>
+    </inkml:brush>
+  </inkml:definitions>
+  <inkml:trace contextRef="#ctx0" brushRef="#br0">260 48 24575,'39'45'0,"-27"-30"0,0-1 0,15 13 0,-21-22 0,0 0 0,1-1 0,0 0 0,0 0 0,0 0 0,0-1 0,0 0 0,1-1 0,-1 1 0,15 1 0,-5-2 0,-1 0 0,1-2 0,34-2 0,-50 2 0,1 0 0,-1 0 0,1-1 0,-1 1 0,1 0 0,-1 0 0,0-1 0,1 1 0,-1-1 0,0 0 0,1 1 0,-1-1 0,0 0 0,0 0 0,0 0 0,0 0 0,0 0 0,0 0 0,0 0 0,0 0 0,0 0 0,0 0 0,0 0 0,1-3 0,-2 3 0,0-1 0,1 0 0,-1 1 0,0-1 0,0 0 0,0 1 0,0-1 0,0 0 0,-1 1 0,1-1 0,0 0 0,-1 1 0,1-1 0,-1 1 0,1-1 0,-1 1 0,0-1 0,0 1 0,0-1 0,0 1 0,-1-2 0,-3-3 0,-1 1 0,1-1 0,-1 1 0,0 0 0,-1 0 0,0 1 0,1 0 0,-15-6 0,-5-1 0,-30-8 0,47 16 0,-12-3 0,-1 1 0,0 1 0,-37-2 0,-68 5 0,84 2 0,38-1 0,0 1 0,0 0 0,0 0 0,1 0 0,-1 0 0,0 1 0,0-1 0,1 2 0,-1-1 0,1 0 0,0 1 0,-1-1 0,1 1 0,0 1 0,1-1 0,-1 0 0,1 1 0,-1 0 0,1 0 0,0 0 0,0 0 0,1 0 0,-4 7 0,4-8 0,1 1 0,0-1 0,-1 1 0,1 0 0,0 0 0,1-1 0,-1 1 0,1 0 0,-1 0 0,1 0 0,0 0 0,1 0 0,-1-1 0,1 1 0,-1 0 0,1 0 0,1 0 0,-1-1 0,0 1 0,1-1 0,-1 1 0,1-1 0,0 1 0,1-1 0,-1 0 0,0 0 0,1 0 0,0 0 0,-1-1 0,7 5 0,-1-1 0,0-1 0,1 0 0,0-1 0,0 1 0,0-1 0,1-1 0,-1 0 0,1-1 0,0 1 0,14 0 0,5-1 0,1-1 0,35-4 0,-55 2 0,-1 0 0,1 0 0,-1-1 0,1 0 0,-1-1 0,0 1 0,0-2 0,0 0 0,0 0 0,-1 0 0,0-1 0,0 0 0,0-1 0,0 0 0,-1 0 0,11-12 0,7-8 0,-4 1 0,2 2 0,1 0 0,45-32 0,-62 50 0,0 1 0,0 0 0,0 0 0,14-5 0,-17 8 0,0 0 0,0 1 0,1-1 0,-1 1 0,0 0 0,1 0 0,-1 0 0,0 0 0,0 1 0,9 2 0,-6-1 0,0 1 0,-1 0 0,1 0 0,0 1 0,-1-1 0,0 2 0,0-1 0,6 6 0,2 1 0,223 161 34,31 24-794,76 86 615,-323-265 156,-5-3 34,0 0 0,16 18-1,-31-30-3,1 0 0,-1-1-1,1 1 1,0-1-1,-1 1 1,1-1-1,0 0 1,0 0-1,0 1 1,0-1-1,0-1 1,0 1-1,0 0 1,0 0-1,0-1 1,0 1-1,0-1 1,3 0 0,-4 0-46,0 0 1,0 0 0,0 0 0,0 0 0,0-1 0,0 1 0,-1 0 0,1-1-1,0 1 1,0 0 0,0-1 0,-1 1 0,1-1 0,0 0 0,0 1 0,-1-1 0,2-1-1,-1 1 8,0-1-1,0 1 0,0-1 1,-1 1-1,1-1 0,-1 0 0,1 1 1,-1-1-1,1 0 0,-1 1 1,0-1-1,0-3 0,-1-16-1367,-1-1-5461</inkml:trace>
+</inkml:ink>
+</file>
+
+<file path=ppt/ink/ink11.xml><?xml version="1.0" encoding="utf-8"?>
+<inkml:ink xmlns:inkml="http://www.w3.org/2003/InkML">
+  <inkml:definitions>
+    <inkml:context xml:id="ctx0">
+      <inkml:inkSource xml:id="inkSrc0">
+        <inkml:traceFormat>
+          <inkml:channel name="X" type="integer" min="-2.14748E9" max="2.14748E9" units="cm"/>
+          <inkml:channel name="Y" type="integer" min="-2.14748E9" max="2.14748E9" units="cm"/>
+          <inkml:channel name="F" type="integer" max="32767" units="dev"/>
+        </inkml:traceFormat>
+        <inkml:channelProperties>
+          <inkml:channelProperty channel="X" name="resolution" value="1000" units="1/cm"/>
+          <inkml:channelProperty channel="Y" name="resolution" value="1000" units="1/cm"/>
+          <inkml:channelProperty channel="F" name="resolution" value="0" units="1/dev"/>
+        </inkml:channelProperties>
+      </inkml:inkSource>
+      <inkml:timestamp xml:id="ts0" timeString="2025-06-24T19:50:33.696"/>
+    </inkml:context>
+    <inkml:brush xml:id="br0">
+      <inkml:brushProperty name="width" value="0.035" units="cm"/>
+      <inkml:brushProperty name="height" value="0.035" units="cm"/>
+    </inkml:brush>
+  </inkml:definitions>
+  <inkml:trace contextRef="#ctx0" brushRef="#br0">0 46 24575,'14'19'0,"-12"-15"0,0-1 0,0 0 0,1 0 0,-1 0 0,1-1 0,-1 1 0,1 0 0,4 2 0,-7-5 0,1 0 0,-1 0 0,0 0 0,0 0 0,0 1 0,1-1 0,-1 0 0,0 0 0,0 0 0,0 0 0,1 0 0,-1 0 0,0 0 0,0-1 0,0 1 0,1 0 0,-1 0 0,0 0 0,0 0 0,0 0 0,0 0 0,1 0 0,-1 0 0,0 0 0,0-1 0,0 1 0,0 0 0,1 0 0,-1 0 0,0 0 0,0 0 0,0-1 0,0 1 0,0 0 0,0 0 0,0 0 0,1-1 0,-1 1 0,0 0 0,0 0 0,0 0 0,0-1 0,0 1 0,0 0 0,0 0 0,0-1 0,1-11 0,-1 11 0,1-11 0,-1 6 0,0 0 0,0 1 0,1-1 0,0 0 0,2-7 0,-2 11 0,-1 1 0,1 0 0,-1 0 0,1 0 0,0-1 0,-1 1 0,1 0 0,0 0 0,0 0 0,0 0 0,0 0 0,0 0 0,0 1 0,0-1 0,0 0 0,0 0 0,0 1 0,0-1 0,1 1 0,-1-1 0,0 1 0,0-1 0,1 1 0,-1 0 0,0 0 0,1-1 0,-1 1 0,0 0 0,2 0 0,0 1 0,0-1 0,-1 0 0,1 1 0,0-1 0,-1 1 0,1 0 0,-1 0 0,1 0 0,-1 0 0,1 0 0,-1 1 0,0-1 0,3 3 0,-1-1 0,0 1 0,0 0 0,-1 0 0,1 0 0,-1 0 0,3 6 0,2 6 0,0-1 0,10 34 0,-18-48 0,9 27 0,2 6 0,1-1 0,32 63 0,-15-50-20,1-1-1,38 41 0,84 82-1060,882 847-2489,-1008-990 3590,-15-14 210,0-1 1,1 0 0,21 15 0,-33-25-189,1 0 0,-1 1 0,0-1 0,1 0 0,-1 0 0,0 1 0,1-1 0,-1 0 0,1 0 0,-1 0 0,0 0 0,1 0 0,-1 1 0,1-1 0,-1 0 1,0 0-1,1 0 0,-1 0 0,1 0 0,-1 0 0,0 0 0,1 0 0,-1-1 0,1 1 0,-1 0 0,1 0 0,-1 0 0,0 0 0,1-1 0,-1 1 0,0 0 1,1 0-1,-1 0 0,0-1 0,1 1 0,-1 0 0,0-1 0,0 1 0,1 0 0,-1-1 0,0 1 0,0 0 0,1-1 0,-1 1 0,0 0 0,0-1 0,0 1 0,0-1 1,0 1-1,0-1 0,1 1 0,-1-1 0,0-25 852,-3 2-661,-1-1-1,-11-37 0,-22-48-315,10 33 116,-153-402-33,111 295 0,21 52 0,31 81 0,10 30 0,-15-31 0,21 50-124,0-1 0,-1 1 0,0-1 0,0 1 0,0 0 0,0 0-1,0 0 1,0 0 0,0 0 0,-3-2 0,-8-3-6702</inkml:trace>
+</inkml:ink>
+</file>
+
+<file path=ppt/ink/ink12.xml><?xml version="1.0" encoding="utf-8"?>
+<inkml:ink xmlns:inkml="http://www.w3.org/2003/InkML">
+  <inkml:definitions>
+    <inkml:context xml:id="ctx0">
+      <inkml:inkSource xml:id="inkSrc0">
+        <inkml:traceFormat>
+          <inkml:channel name="X" type="integer" min="-2.14748E9" max="2.14748E9" units="cm"/>
+          <inkml:channel name="Y" type="integer" min="-2.14748E9" max="2.14748E9" units="cm"/>
+          <inkml:channel name="F" type="integer" max="32767" units="dev"/>
+        </inkml:traceFormat>
+        <inkml:channelProperties>
+          <inkml:channelProperty channel="X" name="resolution" value="1000" units="1/cm"/>
+          <inkml:channelProperty channel="Y" name="resolution" value="1000" units="1/cm"/>
+          <inkml:channelProperty channel="F" name="resolution" value="0" units="1/dev"/>
+        </inkml:channelProperties>
+      </inkml:inkSource>
+      <inkml:timestamp xml:id="ts0" timeString="2025-06-24T19:50:34.704"/>
+    </inkml:context>
+    <inkml:brush xml:id="br0">
+      <inkml:brushProperty name="width" value="0.035" units="cm"/>
+      <inkml:brushProperty name="height" value="0.035" units="cm"/>
+    </inkml:brush>
+  </inkml:definitions>
+  <inkml:trace contextRef="#ctx0" brushRef="#br0">664 1 24575,'-1'0'0,"0"0"0,0 0 0,0 1 0,0-1 0,0 1 0,0-1 0,0 1 0,0-1 0,0 1 0,0-1 0,0 1 0,0 0 0,0 0 0,0-1 0,-1 3 0,-12 16 0,8-11 0,-85 97 0,-40 52 0,107-126 0,2 1 0,0 1 0,-20 44 0,35-63 0,0-1 0,-2 0 0,-13 17 0,-6 9 0,23-32 0,-8 12 0,2 1 0,0 0 0,-9 23 0,15-32 0,-1 0 0,0 0 0,0-1 0,-1 0 0,0 0 0,-1 0 0,0-1 0,-17 15 0,10-9 0,1 1 0,-20 31 0,18-12-1365,12-26-5461</inkml:trace>
+</inkml:ink>
+</file>
+
+<file path=ppt/ink/ink13.xml><?xml version="1.0" encoding="utf-8"?>
+<inkml:ink xmlns:inkml="http://www.w3.org/2003/InkML">
+  <inkml:definitions>
+    <inkml:context xml:id="ctx0">
+      <inkml:inkSource xml:id="inkSrc0">
+        <inkml:traceFormat>
+          <inkml:channel name="X" type="integer" min="-2.14748E9" max="2.14748E9" units="cm"/>
+          <inkml:channel name="Y" type="integer" min="-2.14748E9" max="2.14748E9" units="cm"/>
+          <inkml:channel name="F" type="integer" max="32767" units="dev"/>
+        </inkml:traceFormat>
+        <inkml:channelProperties>
+          <inkml:channelProperty channel="X" name="resolution" value="1000" units="1/cm"/>
+          <inkml:channelProperty channel="Y" name="resolution" value="1000" units="1/cm"/>
+          <inkml:channelProperty channel="F" name="resolution" value="0" units="1/dev"/>
+        </inkml:channelProperties>
+      </inkml:inkSource>
+      <inkml:timestamp xml:id="ts0" timeString="2025-06-24T19:50:38.773"/>
+    </inkml:context>
+    <inkml:brush xml:id="br0">
+      <inkml:brushProperty name="width" value="0.035" units="cm"/>
+      <inkml:brushProperty name="height" value="0.035" units="cm"/>
+    </inkml:brush>
+  </inkml:definitions>
+  <inkml:trace contextRef="#ctx0" brushRef="#br0">0 1 24575,'2'41'0,"11"64"0,0-12 0,1 18 0,1 20 0,-7 410 0,-10-322 0,2 404 0,-1-605 0,-1 0 0,-1-1 0,-1 0 0,-10 32 0,8-30 0,1 1 0,0 0 0,-2 23 0,5 169 0,1-24 0,-12 335 0,13 61 0,2-551 0,1 0 0,16 64 0,-11-61 0,-2 0 0,3 45 0,-9 43 0,1 25 0,14-5 0,-12-113 0,1-1 0,13 48 0,-1-9 0,45 217 0,-31-157 0,22 119 0,-34-153 0,-9-56 0,6 65 0,-9-18 0,5 1 0,29 116 0,-32-169 0,-2 1 0,-1 0 0,-2 0 0,-2 51 0,-3 755 0,3-448 0,-2-323 0,3 78 0,5-105 0,-4-31 0,2 23 0,-5 79 19,0-66-1403,0-31-5442</inkml:trace>
+</inkml:ink>
+</file>
+
+<file path=ppt/ink/ink14.xml><?xml version="1.0" encoding="utf-8"?>
+<inkml:ink xmlns:inkml="http://www.w3.org/2003/InkML">
+  <inkml:definitions>
+    <inkml:context xml:id="ctx0">
+      <inkml:inkSource xml:id="inkSrc0">
+        <inkml:traceFormat>
+          <inkml:channel name="X" type="integer" min="-2.14748E9" max="2.14748E9" units="cm"/>
+          <inkml:channel name="Y" type="integer" min="-2.14748E9" max="2.14748E9" units="cm"/>
+          <inkml:channel name="F" type="integer" max="32767" units="dev"/>
+        </inkml:traceFormat>
+        <inkml:channelProperties>
+          <inkml:channelProperty channel="X" name="resolution" value="1000" units="1/cm"/>
+          <inkml:channelProperty channel="Y" name="resolution" value="1000" units="1/cm"/>
+          <inkml:channelProperty channel="F" name="resolution" value="0" units="1/dev"/>
+        </inkml:channelProperties>
+      </inkml:inkSource>
+      <inkml:timestamp xml:id="ts0" timeString="2025-06-24T19:50:41.310"/>
+    </inkml:context>
+    <inkml:brush xml:id="br0">
+      <inkml:brushProperty name="width" value="0.035" units="cm"/>
+      <inkml:brushProperty name="height" value="0.035" units="cm"/>
+    </inkml:brush>
+  </inkml:definitions>
+  <inkml:trace contextRef="#ctx0" brushRef="#br0">1 0 24575,'0'1176'-1015,"8"-1074"1781,0-14-517,-7-75-704,0 0 0,6 24 0,-4-26-6371</inkml:trace>
+</inkml:ink>
+</file>
+
+<file path=ppt/ink/ink15.xml><?xml version="1.0" encoding="utf-8"?>
+<inkml:ink xmlns:inkml="http://www.w3.org/2003/InkML">
+  <inkml:definitions>
+    <inkml:context xml:id="ctx0">
+      <inkml:inkSource xml:id="inkSrc0">
+        <inkml:traceFormat>
+          <inkml:channel name="X" type="integer" min="-2.14748E9" max="2.14748E9" units="cm"/>
+          <inkml:channel name="Y" type="integer" min="-2.14748E9" max="2.14748E9" units="cm"/>
+          <inkml:channel name="F" type="integer" max="32767" units="dev"/>
+        </inkml:traceFormat>
+        <inkml:channelProperties>
+          <inkml:channelProperty channel="X" name="resolution" value="1000" units="1/cm"/>
+          <inkml:channelProperty channel="Y" name="resolution" value="1000" units="1/cm"/>
+          <inkml:channelProperty channel="F" name="resolution" value="0" units="1/dev"/>
+        </inkml:channelProperties>
+      </inkml:inkSource>
+      <inkml:timestamp xml:id="ts0" timeString="2025-06-24T19:50:42.417"/>
+    </inkml:context>
+    <inkml:brush xml:id="br0">
+      <inkml:brushProperty name="width" value="0.035" units="cm"/>
+      <inkml:brushProperty name="height" value="0.035" units="cm"/>
+    </inkml:brush>
+  </inkml:definitions>
+  <inkml:trace contextRef="#ctx0" brushRef="#br0">125 1079 24575,'-4'-3'0,"0"0"0,1 0 0,-1-1 0,1 1 0,0-1 0,0 1 0,0-1 0,1 0 0,-1 0 0,1 0 0,-3-7 0,3 7 0,-12-27 0,1 1 0,1-1 0,2-1 0,-11-63 0,14 49 0,2-1 0,3-90 0,4 111 0,1 1 0,1 0 0,1 0 0,1 0 0,2 1 0,16-39 0,-9 33 0,1 0 0,1 1 0,2 1 0,32-38 0,-40 53 0,71-76 0,-72 79 0,0 1 0,1 1 0,0 0 0,0 0 0,1 1 0,21-9 0,-25 13 0,0 1 0,-1 0 0,1 0 0,0 1 0,0 0 0,0 0 0,0 1 0,0 0 0,0 1 0,0-1 0,0 2 0,0-1 0,10 4 0,-7-1 0,0 0 0,-1 0 0,0 1 0,1 1 0,-1 0 0,-1 0 0,1 1 0,11 11 0,-15-12 0,-1 1 0,1-1 0,-1 1 0,-1 0 0,0 0 0,0 0 0,0 1 0,-1-1 0,0 1 0,0 0 0,-1 0 0,0 0 0,0 0 0,-1 0 0,0 0 0,-1 12 0,0 10 0,-2 1 0,-12 60 0,4-48 0,-1-1 0,-23 57 0,-44 78 0,69-159 0,-5 8 0,-1 0 0,-1-2 0,-1 0 0,-37 41 0,48-59-97,0 0-1,-1 0 1,1 0-1,-1-1 1,0 0-1,-1 0 1,1 0-1,-1-1 1,0-1-1,0 1 1,0-1-1,0-1 0,-13 4 1,8-5-6729</inkml:trace>
+</inkml:ink>
+</file>
+
+<file path=ppt/ink/ink16.xml><?xml version="1.0" encoding="utf-8"?>
+<inkml:ink xmlns:inkml="http://www.w3.org/2003/InkML">
+  <inkml:definitions>
+    <inkml:context xml:id="ctx0">
+      <inkml:inkSource xml:id="inkSrc0">
+        <inkml:traceFormat>
+          <inkml:channel name="X" type="integer" min="-2.14748E9" max="2.14748E9" units="cm"/>
+          <inkml:channel name="Y" type="integer" min="-2.14748E9" max="2.14748E9" units="cm"/>
+          <inkml:channel name="F" type="integer" max="32767" units="dev"/>
+        </inkml:traceFormat>
+        <inkml:channelProperties>
+          <inkml:channelProperty channel="X" name="resolution" value="1000" units="1/cm"/>
+          <inkml:channelProperty channel="Y" name="resolution" value="1000" units="1/cm"/>
+          <inkml:channelProperty channel="F" name="resolution" value="0" units="1/dev"/>
+        </inkml:channelProperties>
+      </inkml:inkSource>
+      <inkml:timestamp xml:id="ts0" timeString="2025-06-24T19:50:44.132"/>
+    </inkml:context>
+    <inkml:brush xml:id="br0">
+      <inkml:brushProperty name="width" value="0.035" units="cm"/>
+      <inkml:brushProperty name="height" value="0.035" units="cm"/>
+    </inkml:brush>
+  </inkml:definitions>
+  <inkml:trace contextRef="#ctx0" brushRef="#br0">243 296 24575,'2'-1'0,"0"1"0,0 0 0,0-1 0,0 0 0,0 1 0,0-1 0,-1 0 0,1 0 0,3-2 0,7-4 0,29-11 0,-27 11 0,-1 1 0,1 1 0,20-5 0,-29 9 0,0 0 0,0 0 0,1 1 0,-1 0 0,0 0 0,1 0 0,-1 1 0,0 0 0,0 0 0,1 0 0,-1 1 0,0-1 0,7 4 0,66 32 0,-76-36 0,1 0 0,0 0 0,-1 0 0,1 0 0,-1 0 0,0 1 0,1-1 0,-1 1 0,0 0 0,0 0 0,0 0 0,0 0 0,0 0 0,0 0 0,-1 0 0,1 1 0,-1-1 0,0 1 0,1-1 0,-1 1 0,0-1 0,0 1 0,-1 0 0,1-1 0,-1 1 0,1 0 0,-1 0 0,0-1 0,0 5 0,-3 143 0,3-145 0,-1 1 0,0-1 0,0 1 0,0-1 0,-1 0 0,0 1 0,0-1 0,0 0 0,-4 6 0,-4 6 0,-15 19 0,15-23 0,-7 10 0,-2-1 0,-40 38 0,51-53 0,1 0 0,-1 0 0,-1-1 0,0 1 0,0-2 0,0 0 0,0 0 0,-1 0 0,1-1 0,-21 5 0,-2-3 0,1-1 0,-1-1 0,0-2 0,-61-4 0,89 2 0,0-1 0,0 1 0,0-1 0,0 0 0,0 0 0,0-1 0,0 1 0,1-1 0,-1 0 0,1 0 0,-1 0 0,1-1 0,0 1 0,-6-6 0,6 4 0,-1 0 0,1-1 0,0 1 0,0-1 0,1 0 0,-1 0 0,1 0 0,0 0 0,-2-9 0,1-7 0,0 0 0,1 0 0,1 0 0,3-32 0,-2 48 0,8-83 0,20-98 0,-23 165 0,1 1 0,1 0 0,1 0 0,0 0 0,2 1 0,0 0 0,1 1 0,1 0 0,0 1 0,24-24 0,-27 32 0,1 0 0,16-11 0,5-4 0,-30 23-80,1-1 0,-1 1-1,1 0 1,-1 0 0,1 0-1,0 0 1,-1 0 0,1 0-1,0 1 1,0-1 0,0 1 0,0-1-1,-1 1 1,1-1 0,0 1-1,2 0 1,5 1-6746</inkml:trace>
+</inkml:ink>
+</file>
+
+<file path=ppt/ink/ink17.xml><?xml version="1.0" encoding="utf-8"?>
+<inkml:ink xmlns:inkml="http://www.w3.org/2003/InkML">
+  <inkml:definitions>
+    <inkml:context xml:id="ctx0">
+      <inkml:inkSource xml:id="inkSrc0">
+        <inkml:traceFormat>
+          <inkml:channel name="X" type="integer" min="-2.14748E9" max="2.14748E9" units="cm"/>
+          <inkml:channel name="Y" type="integer" min="-2.14748E9" max="2.14748E9" units="cm"/>
+          <inkml:channel name="F" type="integer" max="32767" units="dev"/>
+        </inkml:traceFormat>
+        <inkml:channelProperties>
+          <inkml:channelProperty channel="X" name="resolution" value="1000" units="1/cm"/>
+          <inkml:channelProperty channel="Y" name="resolution" value="1000" units="1/cm"/>
+          <inkml:channelProperty channel="F" name="resolution" value="0" units="1/dev"/>
+        </inkml:channelProperties>
+      </inkml:inkSource>
+      <inkml:timestamp xml:id="ts0" timeString="2025-06-24T19:50:45.749"/>
+    </inkml:context>
+    <inkml:brush xml:id="br0">
+      <inkml:brushProperty name="width" value="0.035" units="cm"/>
+      <inkml:brushProperty name="height" value="0.035" units="cm"/>
+    </inkml:brush>
+  </inkml:definitions>
+  <inkml:trace contextRef="#ctx0" brushRef="#br0">42 784 24575,'0'-35'0,"5"-197"0,-1 186 0,1 0 0,24-88 0,-24 117 0,1 0 0,1 0 0,0 0 0,2 1 0,0 0 0,0 1 0,1 0 0,20-21 0,-21 25 0,2 2 0,-1-1 0,2 1 0,-1 1 0,1 0 0,0 0 0,1 2 0,-1-1 0,1 2 0,1-1 0,16-3 0,10 0 0,1 1 0,-1 3 0,1 1 0,53 2 0,-83 2 0,0 0 0,-1 1 0,17 3 0,-24-3 0,1 0 0,-1 0 0,0 1 0,0-1 0,0 1 0,0-1 0,0 1 0,0 0 0,0 0 0,0 0 0,-1 1 0,1-1 0,-1 1 0,0-1 0,3 4 0,3 6 0,-1 0 0,1 0 0,8 23 0,-14-29 0,0 0 0,-1 0 0,1-1 0,-1 1 0,-1 1 0,1-1 0,-1 0 0,0 0 0,0 0 0,-1 0 0,-2 10 0,-5 17 0,-1-1 0,-2 1 0,-1-2 0,-25 45 0,1-11 0,-73 98 0,42-75 0,-53 66 0,84-111 0,-61 54 0,84-85 0,-1-1 0,0-1 0,-27 15 0,34-21 0,-1-1 0,0 1 0,0-1 0,0-1 0,0 0 0,-1 0 0,1 0 0,0-1 0,-14 0 0,8-3-1365,3-2-5461</inkml:trace>
+</inkml:ink>
+</file>
+
+<file path=ppt/ink/ink18.xml><?xml version="1.0" encoding="utf-8"?>
+<inkml:ink xmlns:inkml="http://www.w3.org/2003/InkML">
+  <inkml:definitions>
+    <inkml:context xml:id="ctx0">
+      <inkml:inkSource xml:id="inkSrc0">
+        <inkml:traceFormat>
+          <inkml:channel name="X" type="integer" min="-2.14748E9" max="2.14748E9" units="cm"/>
+          <inkml:channel name="Y" type="integer" min="-2.14748E9" max="2.14748E9" units="cm"/>
+          <inkml:channel name="F" type="integer" max="32767" units="dev"/>
+        </inkml:traceFormat>
+        <inkml:channelProperties>
+          <inkml:channelProperty channel="X" name="resolution" value="1000" units="1/cm"/>
+          <inkml:channelProperty channel="Y" name="resolution" value="1000" units="1/cm"/>
+          <inkml:channelProperty channel="F" name="resolution" value="0" units="1/dev"/>
+        </inkml:channelProperties>
+      </inkml:inkSource>
+      <inkml:timestamp xml:id="ts0" timeString="2025-06-24T19:50:11.718"/>
+    </inkml:context>
+    <inkml:brush xml:id="br0">
+      <inkml:brushProperty name="width" value="0.035" units="cm"/>
+      <inkml:brushProperty name="height" value="0.035" units="cm"/>
+    </inkml:brush>
+  </inkml:definitions>
+  <inkml:trace contextRef="#ctx0" brushRef="#br0">0 2714 24575,'0'-2'0,"1"0"0,-1 1 0,0-1 0,0 1 0,1-1 0,-1 0 0,1 1 0,-1-1 0,1 1 0,1-3 0,2-4 0,103-208 0,-17 37 0,10-42 14,27-61-257,-126 281 242,266-573-1821,-15-9 347,-103 145 792,-128 342 2616,-19 85-1627,-1 0 0,0-1-1,-1 1 1,0 0 0,-1-1-1,-3-14 1,4 26-304,0 0 1,0 0 0,0 0-1,0 0 1,0 0 0,0 0-1,0 0 1,0 0 0,0 0-1,0 0 1,0 0 0,0 0-1,0 0 1,0 0-1,0 0 1,0 0 0,0 0-1,0 0 1,0 0 0,0 0-1,0 0 1,0 0 0,-1 0-1,1 0 1,0 0 0,0 0-1,0 0 1,0 0-1,0 0 1,0 0 0,0 0-1,0 0 1,0 0 0,0 0-1,0-1 1,0 1 0,0 0-1,0 0 1,0 0 0,0 0-1,0 0 1,0 0-1,0 0 1,0 0 0,0 0-1,0 0 1,0 0 0,0 0-1,0 0 1,0 0 0,0 0-1,-2 6 33,1 12-70,-15 260 35,26-12-389,20-1-418,-19-173 521,75 712-62,-74-690 210,1 43 188,-12-113 909,-5 66 0,1-96-2324,0-4-5461</inkml:trace>
+</inkml:ink>
+</file>
+
+<file path=ppt/ink/ink19.xml><?xml version="1.0" encoding="utf-8"?>
+<inkml:ink xmlns:inkml="http://www.w3.org/2003/InkML">
+  <inkml:definitions>
+    <inkml:context xml:id="ctx0">
+      <inkml:inkSource xml:id="inkSrc0">
+        <inkml:traceFormat>
+          <inkml:channel name="X" type="integer" min="-2.14748E9" max="2.14748E9" units="cm"/>
+          <inkml:channel name="Y" type="integer" min="-2.14748E9" max="2.14748E9" units="cm"/>
+          <inkml:channel name="F" type="integer" max="32767" units="dev"/>
+        </inkml:traceFormat>
+        <inkml:channelProperties>
+          <inkml:channelProperty channel="X" name="resolution" value="1000" units="1/cm"/>
+          <inkml:channelProperty channel="Y" name="resolution" value="1000" units="1/cm"/>
+          <inkml:channelProperty channel="F" name="resolution" value="0" units="1/dev"/>
+        </inkml:channelProperties>
+      </inkml:inkSource>
+      <inkml:timestamp xml:id="ts0" timeString="2025-06-24T19:50:13.238"/>
+    </inkml:context>
+    <inkml:brush xml:id="br0">
+      <inkml:brushProperty name="width" value="0.035" units="cm"/>
+      <inkml:brushProperty name="height" value="0.035" units="cm"/>
+    </inkml:brush>
+  </inkml:definitions>
+  <inkml:trace contextRef="#ctx0" brushRef="#br0">1 288 24575,'17'-1'0,"0"0"0,0-1 0,27-6 0,47-21 0,-16 4 0,114-22 0,-156 39 0,-1-2 0,44-19 0,-16 6 0,-6-1 0,-42 18 0,-1 1 0,1 0 0,0 1 0,0 0 0,0 0 0,26-3 0,72 8 0,-105-2 0,1 0 0,0-1 0,-1 1 0,0-1 0,1 0 0,-1-1 0,0 1 0,6-5 0,25-10 0,-17 12-1365,-3 2-5461</inkml:trace>
+</inkml:ink>
+</file>
+
+<file path=ppt/ink/ink2.xml><?xml version="1.0" encoding="utf-8"?>
+<inkml:ink xmlns:inkml="http://www.w3.org/2003/InkML">
+  <inkml:definitions>
+    <inkml:context xml:id="ctx0">
+      <inkml:inkSource xml:id="inkSrc0">
+        <inkml:traceFormat>
+          <inkml:channel name="X" type="integer" min="-2.14748E9" max="2.14748E9" units="cm"/>
+          <inkml:channel name="Y" type="integer" min="-2.14748E9" max="2.14748E9" units="cm"/>
+          <inkml:channel name="F" type="integer" max="32767" units="dev"/>
+        </inkml:traceFormat>
+        <inkml:channelProperties>
+          <inkml:channelProperty channel="X" name="resolution" value="1000" units="1/cm"/>
+          <inkml:channelProperty channel="Y" name="resolution" value="1000" units="1/cm"/>
+          <inkml:channelProperty channel="F" name="resolution" value="0" units="1/dev"/>
+        </inkml:channelProperties>
+      </inkml:inkSource>
+      <inkml:timestamp xml:id="ts0" timeString="2025-06-24T19:50:59.026"/>
+    </inkml:context>
+    <inkml:brush xml:id="br0">
+      <inkml:brushProperty name="width" value="0.035" units="cm"/>
+      <inkml:brushProperty name="height" value="0.035" units="cm"/>
+    </inkml:brush>
+  </inkml:definitions>
+  <inkml:trace contextRef="#ctx0" brushRef="#br0">8359 1 24575,'-3'2'0,"0"0"0,1-1 0,-1 1 0,0-1 0,0 0 0,0 1 0,0-1 0,-6 1 0,-8 3 0,-22 12 0,-4 2 0,-68 19 0,-59 16 0,58-17 0,-107 31-1155,-503 168 587,317-86 574,-207 74-165,478-178-365,-126 46 129,7 17 1912,-233 153-239,41-36-1278,141-80 0,294-141 0,-465 261 0,404-221 0,-439 296 0,379-242 0,-281 198 0,143-96 0,184-141 0,16-12 0,58-39 0,1 1 0,-18 21 0,20-20 0,-1-1 0,-1-1 0,-12 12 0,-7 3 0,2 1 0,-28 35 0,32-35 0,-132 148 0,-105 110 0,208-234 0,28-28 0,1 1 0,1 1 0,-20 27 0,35-40 0,4-6 0,0-1 0,0 1 0,1 0 0,0 0 0,0-1 0,0 1 0,0 1 0,1-1 0,-2 5 0,2-6 0,1 0 0,-1 0 0,0 0 0,0 0 0,0-1 0,0 1 0,0 0 0,0 0 0,-1-1 0,0 1 0,1-1 0,-1 1 0,-3 2 0,2-3 0,0 0 0,0 0 0,0 0 0,-1 0 0,1 0 0,0-1 0,-1 1 0,1-1 0,-1 0 0,-6 1 0,-7 2 0,0 1 0,0 1 0,0 0 0,0 1 0,1 1 0,0 0 0,1 1 0,-25 20 0,-185 163 0,137-112-139,-255 210-557,300-255 696,28-20 0,-2-1 0,0-1 0,-1-1 0,-32 17 0,47-27 35,0-1 0,1 0-1,-1 0 1,0 0 0,0-1 0,0 1 0,0-1-1,0 1 1,0-1 0,0 0 0,-6-1 0,8 1-19,-1-1 0,1 1 0,0-1 0,-1 1 0,1-1 0,0 0 0,-1 1 0,1-1 0,0 0 0,0 0 0,0 0 0,0 0 0,0 0 1,0 0-1,0 0 0,0 0 0,0-1 0,0 1 0,1 0 0,-1 0 0,1-1 0,-1 1 0,1 0 0,-1-1 0,0-2 0,-3-36-1381,4 21-5461</inkml:trace>
+</inkml:ink>
+</file>
+
+<file path=ppt/ink/ink20.xml><?xml version="1.0" encoding="utf-8"?>
+<inkml:ink xmlns:inkml="http://www.w3.org/2003/InkML">
+  <inkml:definitions>
+    <inkml:context xml:id="ctx0">
+      <inkml:inkSource xml:id="inkSrc0">
+        <inkml:traceFormat>
+          <inkml:channel name="X" type="integer" min="-2.14748E9" max="2.14748E9" units="cm"/>
+          <inkml:channel name="Y" type="integer" min="-2.14748E9" max="2.14748E9" units="cm"/>
+          <inkml:channel name="F" type="integer" max="32767" units="dev"/>
+        </inkml:traceFormat>
+        <inkml:channelProperties>
+          <inkml:channelProperty channel="X" name="resolution" value="1000" units="1/cm"/>
+          <inkml:channelProperty channel="Y" name="resolution" value="1000" units="1/cm"/>
+          <inkml:channelProperty channel="F" name="resolution" value="0" units="1/dev"/>
+        </inkml:channelProperties>
+      </inkml:inkSource>
+      <inkml:timestamp xml:id="ts0" timeString="2025-06-24T19:50:21.437"/>
+    </inkml:context>
+    <inkml:brush xml:id="br0">
+      <inkml:brushProperty name="width" value="0.035" units="cm"/>
+      <inkml:brushProperty name="height" value="0.035" units="cm"/>
+    </inkml:brush>
+  </inkml:definitions>
+  <inkml:trace contextRef="#ctx0" brushRef="#br0">1 280 24575,'12'-18'0,"2"2"0,0 0 0,0 1 0,2 0 0,0 1 0,1 1 0,32-20 0,-12 12 0,1 2 0,76-27 0,-71 32 0,0 2 0,59-9 0,-78 18 0,0 0 0,0 2 0,0 1 0,0 1 0,48 8 0,-66-8 0,0 1 0,0 0 0,0 0 0,-1 0 0,1 1 0,0 0 0,-1 0 0,0 0 0,0 1 0,0 0 0,0 0 0,-1 0 0,1 1 0,-1-1 0,0 1 0,0 0 0,-1 0 0,4 7 0,-2-2 0,0 1 0,-1 0 0,0 0 0,-1 1 0,0-1 0,-1 1 0,0-1 0,0 21 0,-1-19 0,-2 1 0,1-1 0,-2 1 0,0-1 0,-1 0 0,0 0 0,0 0 0,-2 0 0,0-1 0,0 0 0,-1 0 0,0 0 0,-1 0 0,-1-1 0,-10 12 0,17-22 0,0 1 0,-1 0 0,0-1 0,1 1 0,-1-1 0,0 0 0,0 0 0,0 1 0,0-1 0,0-1 0,0 1 0,0 0 0,0 0 0,0-1 0,0 1 0,0-1 0,0 1 0,-1-1 0,1 0 0,0 0 0,0 0 0,0 0 0,-1-1 0,1 1 0,0 0 0,0-1 0,0 0 0,0 1 0,0-1 0,0 0 0,0 0 0,-3-2 0,2 1 0,0 0 0,0-1 0,1 1 0,-1-1 0,1 0 0,-1 0 0,1 1 0,0-2 0,0 1 0,0 0 0,1 0 0,-1 0 0,1-1 0,-1 1 0,1-1 0,1 1 0,-1-1 0,0 0 0,0-4 0,2-5 0,0 1 0,0 0 0,1 0 0,0 1 0,7-20 0,-2 12 0,0 1 0,18-31 0,-19 39 0,0 1 0,1-1 0,1 1 0,-1 0 0,1 1 0,1 0 0,0 0 0,0 1 0,12-8 0,-16 12 0,-1 1 0,0-1 0,1 1 0,-1 0 0,1 1 0,0-1 0,-1 1 0,1 0 0,0 0 0,0 1 0,0-1 0,0 1 0,0 0 0,0 0 0,0 1 0,0 0 0,-1-1 0,1 2 0,0-1 0,0 0 0,-1 1 0,1 0 0,-1 0 0,5 3 0,1 1 0,-1 0 0,0 1 0,9 8 0,-16-13 0,1 1 0,-1 0 0,1-1 0,-1 1 0,0 0 0,0 1 0,-1-1 0,1 0 0,-1 0 0,1 1 0,-1-1 0,0 1 0,1 5 0,0 19 0,-1-1 0,-4 37 0,1-1 0,2-9-1365,0-40-5461</inkml:trace>
+</inkml:ink>
+</file>
+
+<file path=ppt/ink/ink21.xml><?xml version="1.0" encoding="utf-8"?>
+<inkml:ink xmlns:inkml="http://www.w3.org/2003/InkML">
+  <inkml:definitions>
+    <inkml:context xml:id="ctx0">
+      <inkml:inkSource xml:id="inkSrc0">
+        <inkml:traceFormat>
+          <inkml:channel name="X" type="integer" min="-2.14748E9" max="2.14748E9" units="cm"/>
+          <inkml:channel name="Y" type="integer" min="-2.14748E9" max="2.14748E9" units="cm"/>
+          <inkml:channel name="F" type="integer" max="32767" units="dev"/>
+        </inkml:traceFormat>
+        <inkml:channelProperties>
+          <inkml:channelProperty channel="X" name="resolution" value="1000" units="1/cm"/>
+          <inkml:channelProperty channel="Y" name="resolution" value="1000" units="1/cm"/>
+          <inkml:channelProperty channel="F" name="resolution" value="0" units="1/dev"/>
+        </inkml:channelProperties>
+      </inkml:inkSource>
+      <inkml:timestamp xml:id="ts0" timeString="2025-06-24T19:50:22.861"/>
+    </inkml:context>
+    <inkml:brush xml:id="br0">
+      <inkml:brushProperty name="width" value="0.035" units="cm"/>
+      <inkml:brushProperty name="height" value="0.035" units="cm"/>
+    </inkml:brush>
+  </inkml:definitions>
+  <inkml:trace contextRef="#ctx0" brushRef="#br0">0 0 24575,'0'5'0,"0"5"0,0 3 0,0 3 0,0 0 0,0 1 0,0 0 0,0 0 0,0 2 0,0 1 0,0 0 0,0-1 0,0-1 0,0-1 0,0-3-8191</inkml:trace>
+</inkml:ink>
+</file>
+
+<file path=ppt/ink/ink22.xml><?xml version="1.0" encoding="utf-8"?>
+<inkml:ink xmlns:inkml="http://www.w3.org/2003/InkML">
+  <inkml:definitions>
+    <inkml:context xml:id="ctx0">
+      <inkml:inkSource xml:id="inkSrc0">
+        <inkml:traceFormat>
+          <inkml:channel name="X" type="integer" min="-2.14748E9" max="2.14748E9" units="cm"/>
+          <inkml:channel name="Y" type="integer" min="-2.14748E9" max="2.14748E9" units="cm"/>
+          <inkml:channel name="F" type="integer" max="32767" units="dev"/>
+        </inkml:traceFormat>
+        <inkml:channelProperties>
+          <inkml:channelProperty channel="X" name="resolution" value="1000" units="1/cm"/>
+          <inkml:channelProperty channel="Y" name="resolution" value="1000" units="1/cm"/>
+          <inkml:channelProperty channel="F" name="resolution" value="0" units="1/dev"/>
+        </inkml:channelProperties>
+      </inkml:inkSource>
+      <inkml:timestamp xml:id="ts0" timeString="2025-06-24T19:50:24.779"/>
+    </inkml:context>
+    <inkml:brush xml:id="br0">
+      <inkml:brushProperty name="width" value="0.035" units="cm"/>
+      <inkml:brushProperty name="height" value="0.035" units="cm"/>
+    </inkml:brush>
+  </inkml:definitions>
+  <inkml:trace contextRef="#ctx0" brushRef="#br0">1 338 24575,'0'-5'0,"1"0"0,0 0 0,0 0 0,1 1 0,0-1 0,0 0 0,0 1 0,0-1 0,4-4 0,4-11 0,6-19 0,-9 19 0,17-31 0,-22 47 0,0-1 0,1 1 0,0 0 0,0 0 0,1 0 0,-1 1 0,1-1 0,-1 1 0,1 0 0,0 0 0,0 0 0,7-3 0,-9 5 0,0 0 0,1 0 0,-1 0 0,0 1 0,1-1 0,-1 1 0,1-1 0,0 1 0,-1 0 0,1 0 0,-1 0 0,1 0 0,-1 1 0,1-1 0,-1 1 0,1-1 0,-1 1 0,0 0 0,1 0 0,-1 0 0,0 0 0,1 0 0,-1 1 0,0-1 0,0 1 0,0-1 0,0 1 0,0 0 0,1 2 0,3 3 0,0 1 0,0 0 0,-1 1 0,0 0 0,-1-1 0,4 12 0,3 1 0,20 34 0,-15-28 0,-7-11 0,-1 0 0,-1 1 0,0-1 0,-1 2 0,-1-1 0,-1 1 0,0-1 0,-1 1 0,1 31 0,-5-7 0,0-30 0,0 1 0,1-1 0,1 1 0,3 19 0,-1-26 0,-1-5 0,2-12 0,1-18 0,-4-148 0,-2 94 0,2 71 0,0 1 0,1 0 0,0 0 0,1 0 0,4-11 0,-3 10 0,-1 0 0,0 0 0,3-25 0,-7-108 0,-1 128-1365,-2 3-5461</inkml:trace>
+</inkml:ink>
+</file>
+
+<file path=ppt/ink/ink23.xml><?xml version="1.0" encoding="utf-8"?>
+<inkml:ink xmlns:inkml="http://www.w3.org/2003/InkML">
+  <inkml:definitions>
+    <inkml:context xml:id="ctx0">
+      <inkml:inkSource xml:id="inkSrc0">
+        <inkml:traceFormat>
+          <inkml:channel name="X" type="integer" min="-2.14748E9" max="2.14748E9" units="cm"/>
+          <inkml:channel name="Y" type="integer" min="-2.14748E9" max="2.14748E9" units="cm"/>
+          <inkml:channel name="F" type="integer" max="32767" units="dev"/>
+        </inkml:traceFormat>
+        <inkml:channelProperties>
+          <inkml:channelProperty channel="X" name="resolution" value="1000" units="1/cm"/>
+          <inkml:channelProperty channel="Y" name="resolution" value="1000" units="1/cm"/>
+          <inkml:channelProperty channel="F" name="resolution" value="0" units="1/dev"/>
+        </inkml:channelProperties>
+      </inkml:inkSource>
+      <inkml:timestamp xml:id="ts0" timeString="2025-06-24T19:51:32.059"/>
+    </inkml:context>
+    <inkml:brush xml:id="br0">
+      <inkml:brushProperty name="width" value="0.035" units="cm"/>
+      <inkml:brushProperty name="height" value="0.035" units="cm"/>
+    </inkml:brush>
+  </inkml:definitions>
+  <inkml:trace contextRef="#ctx0" brushRef="#br0">1 7556 24575,'40'0'0,"196"-3"0,0-20 0,-117 2 0,154-22 0,404-11-275,356 52-3141,-623 3 2694,335 0-712,-733-1 1908,-1 0 1,1 1-1,-1 1 1,1 0 0,-1 0-1,0 1 1,0 0 0,0 1-1,0 1 1,-1 0-1,17 10 1,-22-12-451,1 0-1,-1 0 1,1-1-1,0 1 1,0-1-1,10 2 1,-13-4-25,0 1 0,0-1 1,-1 0-1,1 0 0,0 0 0,0 0 1,0-1-1,0 1 0,-1-1 0,1 0 1,0 0-1,0 0 0,-1 0 0,1 0 1,-1 0-1,5-3 0,-3 0 1,1 1 0,0-1 0,-1 1 0,1 1 0,0-1 0,1 1 0,-1 0 0,0 0 0,1 0 0,-1 1 0,1 0 0,0 0 0,8 0 0,146-3 0,-119 3 0,165 0-609,80-4-1828,61-2 987,-237 5 235,1461-12-4518,-1392 18 5165,-174-4 547,48 1 714,85 13 0,-138-14-694,9 2 453,0 0 0,0 0-1,16 6 1,-23-7-154,0 0 0,-1 0-1,1 0 1,0 0 0,0 1 0,-1-1 0,1 0 0,0 1 0,-1-1 0,0 1 0,1 0 0,-1-1 0,0 1-1,0 0 1,0 0 0,0 0 0,0 0 0,0 0 0,0 0 0,0 3 0,0 1 17,1 0 5,-1-1-1,-1 1 1,1 0-1,-1 9 1,0-14-296,0 0 0,0 1 0,0-1 0,-1 0 0,1 0 0,0 1 0,-1-1 0,1 0 0,-1 0 0,1 0 0,-1 0 0,0 0 0,1 0 0,-1 0 0,0 0 0,0 0 0,0 0 0,0 0 0,0-1 0,0 1 0,0 0 0,0 0 0,0-1 0,0 1 0,0-1 0,0 1 0,-2 0 0,-2 0-24,0 0 0,0 1 0,0-2 0,0 1 0,-1-1 0,1 1 0,0-1 0,0-1 0,-1 1 0,1-1 0,0 0 0,0 0 0,0 0 0,0-1 0,0 0 0,-8-4 0,7 2 0,0 1 0,0-2 0,1 1 0,-1-1 0,1 0 0,0 0 0,0 0 0,1-1 0,0 1 0,0-1 0,-6-12 0,-22-51 0,21 42 0,-1 1 0,-2 0 0,-16-24 0,7 15 0,-20-40 0,3 2 0,-121-206 0,20 32 0,-671-1053-1301,391 686 1307,-27 21-35,60 161-89,143 158 971,55 59-264,-77-54-589,47 43 0,128 131 0,-54-60 0,119 121 0,15 18 0,-22-22 0,24 28 0,-1-1 0,1 0 0,1 0 0,0-1 0,1 0 0,-12-23 0,13 22 0,-1 0 0,0 1 0,0 0 0,-12-13 0,-10-12 0,-12-16 0,-92-88 0,45 50 0,-168-165 0,95 98 0,149 146 0,2 0 0,0-1 0,0 0 0,1-1 0,0 0 0,2-1 0,-12-24 0,15 29 0,-1-1 0,0 1 0,-13-15 0,-3-7 0,11 15 0,-4-7 0,-1 1 0,-26-30 0,29 38 0,0 0 0,2-1 0,0 0 0,0-1 0,2 0 0,-15-35 0,12 26 0,-28-44 0,24 44 0,-17-36 0,-15-32 0,36 71 0,-18-49 0,3 5 0,16 42 0,-7-31 0,10 32 0,-17-38 0,10 32 0,-52-111 0,21 35-1365,42 99-5461</inkml:trace>
+</inkml:ink>
+</file>
+
+<file path=ppt/ink/ink24.xml><?xml version="1.0" encoding="utf-8"?>
+<inkml:ink xmlns:inkml="http://www.w3.org/2003/InkML">
+  <inkml:definitions>
+    <inkml:context xml:id="ctx0">
+      <inkml:inkSource xml:id="inkSrc0">
+        <inkml:traceFormat>
+          <inkml:channel name="X" type="integer" min="-2.14748E9" max="2.14748E9" units="cm"/>
+          <inkml:channel name="Y" type="integer" min="-2.14748E9" max="2.14748E9" units="cm"/>
+          <inkml:channel name="F" type="integer" max="32767" units="dev"/>
+        </inkml:traceFormat>
+        <inkml:channelProperties>
+          <inkml:channelProperty channel="X" name="resolution" value="1000" units="1/cm"/>
+          <inkml:channelProperty channel="Y" name="resolution" value="1000" units="1/cm"/>
+          <inkml:channelProperty channel="F" name="resolution" value="0" units="1/dev"/>
+        </inkml:channelProperties>
+      </inkml:inkSource>
+      <inkml:timestamp xml:id="ts0" timeString="2025-06-24T19:52:04.108"/>
+    </inkml:context>
+    <inkml:brush xml:id="br0">
+      <inkml:brushProperty name="width" value="0.035" units="cm"/>
+      <inkml:brushProperty name="height" value="0.035" units="cm"/>
+    </inkml:brush>
+  </inkml:definitions>
+  <inkml:trace contextRef="#ctx0" brushRef="#br0">8793 132 24575,'0'5'0,"-1"0"0,0 0 0,0 0 0,0 0 0,-1 0 0,-2 7 0,-2 5 0,-9 26 0,-2 1 0,-2-2 0,-1 0 0,-31 45 0,14-34 0,-2-2 0,-69 72 0,-125 104-697,69-70-1157,-62 67 382,-67 72-2374,-58 71 2241,-45 72-967,-847 1095-837,376-312 2440,42 22 1010,-149 287-41,955-1500 0,-536 858 0,-26-19 0,-547 655 1081,984-1343-898,37-48-183,-11 21 2212,107-139-1848,5-9 483,2 0 0,-1 0 0,-5 11-1,10-16-388,0-1 0,-1 1 0,1 0 0,0 0 0,0-1 0,0 1 0,1 0 0,-1 0 0,0 0 0,1-1 0,-1 1 0,1 0 0,-1-1 0,1 1 0,0 0 0,0-1-1,1 3 1,5 11 455,-7-11-913,1 0 0,0 1 0,-1-1 0,0 1 0,0-1 0,-1 0 0,1 1 0,-1-1 0,0 0 0,-2 7 0,-2 3 0,-13 24 0,10-21 0,-58 105 0,36-71 0,3 2 0,-22 60 0,45-101 0,1-1 0,0 0 0,1 0 0,0 1 0,-1 21 0,3-33 0,0 0 0,0 1 0,0-1 0,0 0 0,0 1 0,0-1 0,0 0 0,0 1 0,0-1 0,0 0 0,0 1 0,0-1 0,0 0 0,0 1 0,0-1 0,0 0 0,0 1 0,0-1 0,0 0 0,1 1 0,-1-1 0,0 0 0,0 0 0,0 1 0,1-1 0,-1 0 0,0 0 0,0 1 0,1-1 0,-1 0 0,0 0 0,0 0 0,1 1 0,-1-1 0,0 0 0,1 0 0,-1 0 0,0 0 0,0 0 0,1 0 0,-1 0 0,0 0 0,1 1 0,-1-1 0,0 0 0,1 0 0,-1 0 0,0-1 0,1 1 0,-1 0 0,0 0 0,1 0 0,-1 0 0,0 0 0,1 0 0,-1 0 0,0 0 0,0-1 0,1 1 0,-1 0 0,0 0 0,1 0 0,-1-1 0,22-19 0,-15 13 0,37-28 0,2 3 0,65-37 0,449-235-1156,-434 246 1049,2 5-1,214-56 1,-265 92 120,0 4 1,1 3 0,129 0 0,237 40-1964,-201 0 1035,356 75-1823,-4 21 2393,-552-117 174,878 211-2477,226 48 100,810 105 2548,-1574-301-21,284 51 147,221-14 407,3-54-453,-333-24 1363,-173-14 1695,-2-14 3377,194-1-5470,0 23-2218,362 62-260,-203-16-279,-503-64 5852,-221-7-4117,0 1 1,23 5-1,7 1-36,198 31 13,-161-23 0,34 7 0,47 8 0,-122-25 0,-1-1 0,50-2 0,-85-3 0,0 1 0,0 0 0,0 0 0,0-1 0,0 1 0,0-1 0,0 0 0,0 1 0,0-1 0,0 0 0,0 0 0,0 0 0,-1-1 0,4-2 0,-4 3 0,0 0 0,0 0 0,0 0 0,0 0 0,-1-1 0,1 1 0,0 0 0,-1-1 0,1 1 0,-1 0 0,1-1 0,-1 1 0,0-1 0,0 1 0,0 0 0,0-1 0,0 1 0,0-1 0,0 1 0,0-1 0,0 1 0,-1-1 0,0-1 0,-3-7 0,0 0 0,-1 1 0,0-1 0,-1 1 0,-10-13 0,2 3 0,-19-28 17,-177-266-408,110 148-1104,-221-407-1802,109 187 2510,-101-166-2581,-244-435 681,23-10 2533,398 730-531,20 33 581,37 73 382,-170-319 1112,-146-148 635,184 301-1423,-574-965 1407,565 944-1911,-16 13 31,177 251-121,-56-76 955,-106-152 2169,201 279-2057,-14-33 0,2 5-908,24 43-167,-11-32 0,3 8 0,-48-102 0,-33-81 0,-111-288 0,39 100 0,144 348 0,-33-86 0,-82-199 0,118 298 0,3-2 0,2-1 0,-13-72 0,17 66 0,-4 0 0,-1 1 0,-4 1 0,-45-88 0,-80-145 0,44 66 0,63 134 0,5 16 0,-24-57 0,-108-231 0,121 269 0,11 34 0,0 1 0,31 47 0,-1 1 0,2-1 0,-4-14 0,-5-19 0,7 28 0,1 0 0,-3-24 0,3 16 0,-1-9 0,3 1 0,1-44 0,2 44 0,-2 0 0,-6-47 0,0-3 0,8 128 0,8 52 0,-6-78-1365,-1-3-5461</inkml:trace>
+</inkml:ink>
+</file>
+
+<file path=ppt/ink/ink25.xml><?xml version="1.0" encoding="utf-8"?>
+<inkml:ink xmlns:inkml="http://www.w3.org/2003/InkML">
+  <inkml:definitions>
+    <inkml:context xml:id="ctx0">
+      <inkml:inkSource xml:id="inkSrc0">
+        <inkml:traceFormat>
+          <inkml:channel name="X" type="integer" min="-2.14748E9" max="2.14748E9" units="cm"/>
+          <inkml:channel name="Y" type="integer" min="-2.14748E9" max="2.14748E9" units="cm"/>
+          <inkml:channel name="F" type="integer" max="32767" units="dev"/>
+        </inkml:traceFormat>
+        <inkml:channelProperties>
+          <inkml:channelProperty channel="X" name="resolution" value="1000" units="1/cm"/>
+          <inkml:channelProperty channel="Y" name="resolution" value="1000" units="1/cm"/>
+          <inkml:channelProperty channel="F" name="resolution" value="0" units="1/dev"/>
+        </inkml:channelProperties>
+      </inkml:inkSource>
+      <inkml:timestamp xml:id="ts0" timeString="2025-06-24T19:52:12.938"/>
+    </inkml:context>
+    <inkml:brush xml:id="br0">
+      <inkml:brushProperty name="width" value="0.035" units="cm"/>
+      <inkml:brushProperty name="height" value="0.035" units="cm"/>
+    </inkml:brush>
+  </inkml:definitions>
+  <inkml:trace contextRef="#ctx0" brushRef="#br0">1 2423 24575,'26'-54'0,"-2"0"0,-3-2 0,-2-1 0,21-109 0,58-400-1048,-15 111 822,64-336 243,-137 739 87,5-91 1,-15 141-51,0 1 0,0-1-1,0 1 1,0 0 0,1-1-1,-1 1 1,0 0 0,1-1 0,-1 1-1,1 0 1,0 0 0,-1-1-1,1 1 1,0 0 0,0 0 0,-1 0-1,1 0 1,0 0 0,2-2-1,-2 3-53,0 0-1,0-1 0,0 1 0,0 0 0,0 0 0,0-1 0,0 1 1,-1 0-1,1 0 0,0 0 0,0 0 0,0 1 0,0-1 1,0 0-1,0 0 0,0 0 0,0 1 0,0-1 0,0 0 1,-1 1-1,1-1 0,0 1 0,0-1 0,0 1 0,-1 0 0,1-1 1,0 1-1,-1 0 0,1-1 0,0 2 0,4 4 1,-1 0 0,0 1 0,-1-1 0,0 1 0,0 0 0,0 0 0,-1 0 0,4 14 0,-1-1 0,61 271 0,-25 7 0,1-32 0,7 68 0,-7-27 0,-17-148 0,-23-144 0,46 247 0,1-116 0,-29-90 0,-15-43 0,-1 0 0,2 0 0,0-1 0,9 14 0,-13-22 0,0-1 0,1 0 0,0 0 0,0 0 0,0 0 0,0 0 0,0 0 0,1-1 0,-1 0 0,1 0 0,0 0 0,-1 0 0,1 0 0,0-1 0,0 0 0,0 1 0,0-1 0,5 0 0,0-1 0,-1 0 0,0 0 0,1 0 0,-1-1 0,1-1 0,-1 0 0,0 0 0,0 0 0,0-1 0,0 0 0,0-1 0,-1 1 0,0-2 0,1 1 0,12-11 0,2-4 0,-1-1 0,0 0 0,22-31 0,-12 11-7,-2-1-1,34-65 1,32-97-796,-48 81 713,32-128 0,15-132 112,-87 351-29,42-209-33,10-42 245,-23 119-745,-35 157-6286</inkml:trace>
+</inkml:ink>
+</file>
+
+<file path=ppt/ink/ink26.xml><?xml version="1.0" encoding="utf-8"?>
+<inkml:ink xmlns:inkml="http://www.w3.org/2003/InkML">
+  <inkml:definitions>
+    <inkml:context xml:id="ctx0">
+      <inkml:inkSource xml:id="inkSrc0">
+        <inkml:traceFormat>
+          <inkml:channel name="X" type="integer" min="-2.14748E9" max="2.14748E9" units="cm"/>
+          <inkml:channel name="Y" type="integer" min="-2.14748E9" max="2.14748E9" units="cm"/>
+          <inkml:channel name="F" type="integer" max="32767" units="dev"/>
+        </inkml:traceFormat>
+        <inkml:channelProperties>
+          <inkml:channelProperty channel="X" name="resolution" value="1000" units="1/cm"/>
+          <inkml:channelProperty channel="Y" name="resolution" value="1000" units="1/cm"/>
+          <inkml:channelProperty channel="F" name="resolution" value="0" units="1/dev"/>
+        </inkml:channelProperties>
+      </inkml:inkSource>
+      <inkml:timestamp xml:id="ts0" timeString="2025-06-24T19:52:15.678"/>
+    </inkml:context>
+    <inkml:brush xml:id="br0">
+      <inkml:brushProperty name="width" value="0.035" units="cm"/>
+      <inkml:brushProperty name="height" value="0.035" units="cm"/>
+    </inkml:brush>
+  </inkml:definitions>
+  <inkml:trace contextRef="#ctx0" brushRef="#br0">0 3293 24575,'1'-17'0,"0"0"0,2 0 0,5-22 0,-3 13 0,202-807-2766,39 15 248,-31 180 2334,18 7-727,-168 439 7091,-64 188-6174,1 0 0,1 0 0,-1 1 1,0-1-1,1 1 0,0 0 0,-1 0 0,1 0 0,1 0 1,-1 0-1,0 1 0,1-1 0,-1 1 0,1 0 0,0 0 1,-1 0-1,1 1 0,0-1 0,0 1 0,8-1 0,5-2 12,0 2-1,0 1 1,29 0-1,-36 1-17,0 1 0,0 1 0,-1 0 0,1 0 0,-1 1 0,1 0 0,-1 0 0,0 1 0,0 0 0,0 1 0,9 6 0,-7-3 0,-1 0 0,0 1 0,0 0 0,-1 0 0,0 1 0,-1 0 0,14 22 0,11 20 0,15 26 0,-42-66 0,0 1 0,-1 0 0,0 0 0,4 23 0,-3 6 0,-2 1 0,-1 0 0,-7 82 0,0-96 0,0 0 0,-2 0 0,-1-1 0,-2 0 0,-22 51 0,-79 127 0,108-202 0,-32 52 0,-3-3 0,-2 0 0,-84 86 0,-80 64 0,180-180 0,-2-1 0,-1-2 0,-30 19 0,46-33 0,-1-1 0,1 0 0,-1-1 0,0 0 0,0-1 0,0 0 0,-12 1 0,5-2 0,-1-1 0,1 0 0,-32-4 0,47 2 0,0 1 0,-1-1 0,1 0 0,0 0 0,0 0 0,0-1 0,0 1 0,0-1 0,0 1 0,1-1 0,-5-3 0,-2-3 0,-15-18 0,17 18 0,-17-16 0,18 20 0,1-1 0,0 0 0,0 0 0,0-1 0,1 1 0,-6-11 0,1 0 0,-8-22 0,13 27 0,-7-11 171,-19-31-1,18 34-1023,-18-39 0,21 35-5973</inkml:trace>
+</inkml:ink>
+</file>
+
+<file path=ppt/ink/ink27.xml><?xml version="1.0" encoding="utf-8"?>
+<inkml:ink xmlns:inkml="http://www.w3.org/2003/InkML">
+  <inkml:definitions>
+    <inkml:context xml:id="ctx0">
+      <inkml:inkSource xml:id="inkSrc0">
+        <inkml:traceFormat>
+          <inkml:channel name="X" type="integer" min="-2.14748E9" max="2.14748E9" units="cm"/>
+          <inkml:channel name="Y" type="integer" min="-2.14748E9" max="2.14748E9" units="cm"/>
+          <inkml:channel name="F" type="integer" max="32767" units="dev"/>
+        </inkml:traceFormat>
+        <inkml:channelProperties>
+          <inkml:channelProperty channel="X" name="resolution" value="1000" units="1/cm"/>
+          <inkml:channelProperty channel="Y" name="resolution" value="1000" units="1/cm"/>
+          <inkml:channelProperty channel="F" name="resolution" value="0" units="1/dev"/>
+        </inkml:channelProperties>
+      </inkml:inkSource>
+      <inkml:timestamp xml:id="ts0" timeString="2025-06-24T19:52:18.387"/>
+    </inkml:context>
+    <inkml:brush xml:id="br0">
+      <inkml:brushProperty name="width" value="0.035" units="cm"/>
+      <inkml:brushProperty name="height" value="0.035" units="cm"/>
+    </inkml:brush>
+  </inkml:definitions>
+  <inkml:trace contextRef="#ctx0" brushRef="#br0">0 1611 24575,'65'-321'0,"-35"148"0,-23 145 0,0 1 0,2-1 0,16-32 0,43-71 0,135-201 0,-192 315 0,37-53 0,3 2 0,3 2 0,66-62 0,-84 94 0,-25 25 0,0 0 0,-1-1 0,0-1 0,0 0 0,15-23 0,-22 28 0,0 1 0,0 0 0,7-7 0,-9 11 0,0-1 0,1 1 0,-1 0 0,1-1 0,-1 1 0,1 0 0,-1 0 0,1 0 0,0 0 0,0 0 0,0 0 0,-1 1 0,1-1 0,3 0 0,-5 1 0,1 0 0,-1 1 0,1-1 0,-1 0 0,1 0 0,-1 1 0,1-1 0,-1 0 0,1 1 0,-1-1 0,0 0 0,1 1 0,-1-1 0,1 1 0,-1-1 0,0 1 0,1-1 0,-1 1 0,0-1 0,0 1 0,0-1 0,1 1 0,-1-1 0,0 1 0,0-1 0,0 1 0,0-1 0,0 1 0,0 0 0,0-1 0,0 1 0,0-1 0,0 1 0,0-1 0,-1 2 0,-1 21 0,-22 78 0,12-54 0,-10 70 0,14 11 0,9 145 0,15-90 0,0 11 0,-14 269 0,-4-224 0,2-224 0,1 1 0,0-1 0,1 0 0,0 1 0,2-1 0,-1 0 0,2 0 0,0-1 0,1 0 0,1 1 0,0-2 0,10 17 0,-8-16 0,-7-10 0,0-1 0,-1 1 0,1-1 0,1 0 0,-1 0 0,0 0 0,1 0 0,-1 0 0,1-1 0,6 5 0,-8-7-31,-1 0 1,0 0-1,1 0 0,-1 0 0,1-1 0,-1 1 0,1 0 1,-1 0-1,1 0 0,-1-1 0,1 1 0,-1 0 1,0-1-1,1 1 0,-1 0 0,0-1 0,1 1 0,-1 0 1,0-1-1,1 1 0,-1-1 0,0 1 0,0-1 0,1 1 1,-1-1-1,0 1 0,0 0 0,0-1 0,0 1 1,0-1-1,0 1 0,0-1 0,0 1 0,0-2 0,1 1-255,1-13-6540</inkml:trace>
+</inkml:ink>
+</file>
+
+<file path=ppt/ink/ink28.xml><?xml version="1.0" encoding="utf-8"?>
+<inkml:ink xmlns:inkml="http://www.w3.org/2003/InkML">
+  <inkml:definitions>
+    <inkml:context xml:id="ctx0">
+      <inkml:inkSource xml:id="inkSrc0">
+        <inkml:traceFormat>
+          <inkml:channel name="X" type="integer" min="-2.14748E9" max="2.14748E9" units="cm"/>
+          <inkml:channel name="Y" type="integer" min="-2.14748E9" max="2.14748E9" units="cm"/>
+          <inkml:channel name="F" type="integer" max="32767" units="dev"/>
+        </inkml:traceFormat>
+        <inkml:channelProperties>
+          <inkml:channelProperty channel="X" name="resolution" value="1000" units="1/cm"/>
+          <inkml:channelProperty channel="Y" name="resolution" value="1000" units="1/cm"/>
+          <inkml:channelProperty channel="F" name="resolution" value="0" units="1/dev"/>
+        </inkml:channelProperties>
+      </inkml:inkSource>
+      <inkml:timestamp xml:id="ts0" timeString="2025-06-24T19:52:19.984"/>
+    </inkml:context>
+    <inkml:brush xml:id="br0">
+      <inkml:brushProperty name="width" value="0.035" units="cm"/>
+      <inkml:brushProperty name="height" value="0.035" units="cm"/>
+    </inkml:brush>
+  </inkml:definitions>
+  <inkml:trace contextRef="#ctx0" brushRef="#br0">1 1 24575,'4'1'0,"0"0"0,1 0 0,-1 0 0,0 1 0,0 0 0,0 0 0,0 0 0,5 3 0,-1 0 0,16 7 0,45 18 0,-56-26 0,0 0 0,0-1 0,0-1 0,1 0 0,21 0 0,234-3-1365,-259 1-5461</inkml:trace>
+</inkml:ink>
+</file>
+
+<file path=ppt/ink/ink3.xml><?xml version="1.0" encoding="utf-8"?>
+<inkml:ink xmlns:inkml="http://www.w3.org/2003/InkML">
+  <inkml:definitions>
+    <inkml:context xml:id="ctx0">
+      <inkml:inkSource xml:id="inkSrc0">
+        <inkml:traceFormat>
+          <inkml:channel name="X" type="integer" min="-2.14748E9" max="2.14748E9" units="cm"/>
+          <inkml:channel name="Y" type="integer" min="-2.14748E9" max="2.14748E9" units="cm"/>
+          <inkml:channel name="F" type="integer" max="32767" units="dev"/>
+        </inkml:traceFormat>
+        <inkml:channelProperties>
+          <inkml:channelProperty channel="X" name="resolution" value="1000" units="1/cm"/>
+          <inkml:channelProperty channel="Y" name="resolution" value="1000" units="1/cm"/>
+          <inkml:channelProperty channel="F" name="resolution" value="0" units="1/dev"/>
+        </inkml:channelProperties>
+      </inkml:inkSource>
+      <inkml:timestamp xml:id="ts0" timeString="2025-06-24T19:51:03.442"/>
+    </inkml:context>
+    <inkml:brush xml:id="br0">
+      <inkml:brushProperty name="width" value="0.035" units="cm"/>
+      <inkml:brushProperty name="height" value="0.035" units="cm"/>
+    </inkml:brush>
+  </inkml:definitions>
+  <inkml:trace contextRef="#ctx0" brushRef="#br0">1 0 24575,'8'1'0,"0"-1"0,-1 2 0,1-1 0,0 1 0,0 0 0,10 4 0,45 24 0,-31-14 0,109 57 0,150 101 0,-148-75 0,-58-38 0,128 119 0,-203-172 0,1 0 0,21 11 0,-3-1 0,97 69 0,-119-83 0,-1-1 0,1 0 0,12 3 0,11 5 0,-2 0 0,1-1 0,1-2 0,33 5 0,26 8 0,356 141 0,-432-156 0,384 176 0,-281-127 0,40 22 0,192 84 0,104 30 0,-177-74 0,-226-96 0,206 82 0,12 14 0,-9 17 0,-195-101 0,322 142 0,-135-67 0,64 33 0,8-16 0,217 88 0,-509-200 0,571 258 0,-420-178 0,-21-12 0,141 79 0,-186-97 0,263 112 0,-156-74 0,-132-57 0,20 14 0,24 11 0,13 1 0,32 14 0,123 51 0,-120-52 0,-89-40 0,162 105 0,-170-86 0,-74-53 0,0 1 0,-1 0 0,-1 0 0,0 1 0,11 17 0,-17-24 0,0-1 0,1 1 0,-1 0 0,1-1 0,-1 0 0,1 0 0,0 0 0,0 0 0,1-1 0,5 3 0,-1 0 0,1-1 0,0-1 0,19 5 0,-19-6 0,0 0 0,1-1 0,-1-1 0,0 1 0,0-2 0,0 1 0,20-5 0,-28 4 0,-1 1 0,1-1 0,0 0 0,0 0 0,-1 0 0,1 0 0,-1 0 0,1-1 0,-1 1 0,1 0 0,-1-1 0,0 1 0,0-1 0,0 1 0,0-1 0,0 1 0,0-1 0,0 0 0,0 0 0,-1 1 0,1-1 0,0 0 0,-1 0 0,0 0 0,1 0 0,-1 0 0,0 0 0,0 0 0,0 0 0,-1-3 0,1 3 0,0-1 0,-1 0 0,0 0 0,1 0 0,-1 1 0,0-1 0,0 0 0,0 1 0,-1-1 0,1 1 0,-1-1 0,1 1 0,-1 0 0,0-1 0,0 1 0,0 0 0,0 0 0,0 1 0,-5-4 0,-5 0-227,0 1-1,0 0 1,-1 1-1,1 0 1,-19-1-1,16 3-6598</inkml:trace>
+</inkml:ink>
+</file>
+
+<file path=ppt/ink/ink4.xml><?xml version="1.0" encoding="utf-8"?>
+<inkml:ink xmlns:inkml="http://www.w3.org/2003/InkML">
+  <inkml:definitions>
+    <inkml:context xml:id="ctx0">
+      <inkml:inkSource xml:id="inkSrc0">
+        <inkml:traceFormat>
+          <inkml:channel name="X" type="integer" min="-2.14748E9" max="2.14748E9" units="cm"/>
+          <inkml:channel name="Y" type="integer" min="-2.14748E9" max="2.14748E9" units="cm"/>
+          <inkml:channel name="F" type="integer" max="32767" units="dev"/>
+        </inkml:traceFormat>
+        <inkml:channelProperties>
+          <inkml:channelProperty channel="X" name="resolution" value="1000" units="1/cm"/>
+          <inkml:channelProperty channel="Y" name="resolution" value="1000" units="1/cm"/>
+          <inkml:channelProperty channel="F" name="resolution" value="0" units="1/dev"/>
+        </inkml:channelProperties>
+      </inkml:inkSource>
+      <inkml:timestamp xml:id="ts0" timeString="2025-06-24T19:51:27.134"/>
+    </inkml:context>
+    <inkml:brush xml:id="br0">
+      <inkml:brushProperty name="width" value="0.035" units="cm"/>
+      <inkml:brushProperty name="height" value="0.035" units="cm"/>
+    </inkml:brush>
+  </inkml:definitions>
+  <inkml:trace contextRef="#ctx0" brushRef="#br0">1919 0 22429,'-1917'7477'0</inkml:trace>
+</inkml:ink>
+</file>
+
+<file path=ppt/ink/ink5.xml><?xml version="1.0" encoding="utf-8"?>
+<inkml:ink xmlns:inkml="http://www.w3.org/2003/InkML">
+  <inkml:definitions>
+    <inkml:context xml:id="ctx0">
+      <inkml:inkSource xml:id="inkSrc0">
+        <inkml:traceFormat>
+          <inkml:channel name="X" type="integer" min="-2.14748E9" max="2.14748E9" units="cm"/>
+          <inkml:channel name="Y" type="integer" min="-2.14748E9" max="2.14748E9" units="cm"/>
+          <inkml:channel name="F" type="integer" max="32767" units="dev"/>
+        </inkml:traceFormat>
+        <inkml:channelProperties>
+          <inkml:channelProperty channel="X" name="resolution" value="1000" units="1/cm"/>
+          <inkml:channelProperty channel="Y" name="resolution" value="1000" units="1/cm"/>
+          <inkml:channelProperty channel="F" name="resolution" value="0" units="1/dev"/>
+        </inkml:channelProperties>
+      </inkml:inkSource>
+      <inkml:timestamp xml:id="ts0" timeString="2025-06-24T19:50:05.572"/>
+    </inkml:context>
+    <inkml:brush xml:id="br0">
+      <inkml:brushProperty name="width" value="0.035" units="cm"/>
+      <inkml:brushProperty name="height" value="0.035" units="cm"/>
+    </inkml:brush>
+  </inkml:definitions>
+  <inkml:trace contextRef="#ctx0" brushRef="#br0">7360 1 24575,'39'66'0,"70"93"0,-72-108 0,497 658-971,169 101 904,-388-428-226,-203-239 256,251 356 74,-82-107-231,-271-379 95,409 515-583,1015 1176-2569,-1265-1500 3146,240 270 105,14-10 0,101 115 0,-154-158-496,690 770-1951,-687-788 2491,404 451-334,584 814 1128,-949-1163 3093,-135-174-1508,-271-323-2228,126 147 1269,-116-136-1464,-1 0 0,25 41 0,-37-56 0,0-1 0,1 0 0,0 0 0,-1 0 0,1 0 0,0-1 0,0 1 0,0-1 0,1 0 0,-1 0 0,0-1 0,6 2 0,-7-2 0,-109-10 0,-157-33 0,183 27 0,-106-22-1076,-269-91 1,334 84 822,2-5 1,3-5 0,-127-80 0,44 5 252,-53-33 0,64 53-627,-4 8 0,-4 8 0,-246-78 0,202 97 627,-3 11 0,-2 10 0,-365-30 0,-150 59-881,-2 58-754,-381 80 1122,462-40 522,-270 16-1352,554-53 1237,-277 41-890,1 16 611,494-68 493,-1640 277-113,1457-239 5,-413 58 1303,-4-62 786,768-60-1732,-101-1 2481,89-1-1570,0 0 0,-41-11-1,58 11-1171,0 0 0,1-1-1,-1 0 1,1 0-1,0 0 1,0-1 0,0 0-1,0 0 1,1 0-1,-8-8 1,-11-11-123,6 8 27,15 12 0,0 0 0,-1 1 0,1-1 0,-1 1 0,0 0 0,0 0 0,0 0 0,0 0 0,0 0 0,0 0 0,0 1 0,-1 0 0,1 0 0,-1 0 0,-3-1 0,-12 0 0,0 2 0,0 0 0,0 1 0,-30 5 0,-77 23 0,115-26 0,-182 48-574,-357 88-138,-7-40 498,528-95 189,-5 1 21,1-2 0,-49-2 0,77-2 53,0 1 1,-1-2 0,1 1-1,0 0 1,0-1-1,0 0 1,0-1 0,0 1-1,1-1 1,-1 1-1,0-2 1,1 1 0,0 0-1,0-1 1,0 0-1,0 0 1,1 0-1,0 0 1,-1 0 0,2-1-1,-1 1 1,0-1-1,1 0 1,0 0 0,0 0-1,0 0 1,1 0-1,0-1 1,0 1 0,-1-11-1,2 9-49,-1 0 0,1 1 0,-1-1 0,0 0 0,-4-9 0,4 14 0,0 0 0,1 1 0,-1-1 0,0 0 0,0 1 0,-1-1 0,1 1 0,0 0 0,0-1 0,-1 1 0,1 0 0,-1-1 0,1 1 0,-1 0 0,0 0 0,1 1 0,-1-1 0,0 0 0,0 0 0,1 1 0,-1-1 0,0 1 0,0-1 0,-3 1 0,-52-2 0,12 1 0,-460-41-609,172 13 281,219 19 328,-182-40 0,244 40 937,59 10-937,1 0 0,-1-1 0,0 0 0,1-1 0,-1 0 0,0 0 0,0 0 0,0-1 0,-1 0 0,1 0 0,-1-1 0,11-7 0,0-2 0,0-1 0,-1 0 0,16-19 0,6-13 0,54-85 0,-68 94 0,10-17-97,-3-1 0,-3-1 0,25-69 0,-24 43-161,30-149 1,-13-93-521,-27 1-395,-14 10 1203,-2 15-756,0 246 661,2 0-1,2 0 1,3 1-1,2 0 1,1 1-1,26-58 0,42-77-1214,31-36 575,30-28-837,371-528-1025,49 34 2321,2 59-88,18 17-287,-406 468 1428,120-144 2748,-203 225-2969,-7-4 3558,-72 99-3407,-1 0 1,15-40-1,-20 34-737,-7 23 0,1 0 0,-1 0 0,1 1 0,0-1 0,4-7 0,86-123 0,-61 94 0,107-132 0,41-60 0,-170 219 0,-1-1 0,0 0 0,-2 0 0,0-1 0,0 0 0,4-26 0,-9 37 0,1 0 0,1 0 0,-1 1 0,1-1 0,0 0 0,1 1 0,-1 0 0,7-7 0,-7 8 0,144-179 0,28-37 0,-156 193 0,19-26 0,-2-1 0,36-75 0,-61 108 0,0 0 0,29-37 0,35-33 0,-13 17 0,186-231 0,24-60 0,-187 242 0,72-111 0,-119 170 0,-3-1 0,39-96 0,-66 126 0,-8 30 0,1-1 0,0 1 0,0 0 0,1-1 0,0 1 0,0 0 0,0 0 0,5-8 0,25-29 0,53-56 0,-12 17 0,-20 14 0,-4-2 0,-3-2 0,-3-2 0,60-137 0,-62 112 0,-39 92 0,1 0 0,0 1 0,0-1 0,1 1 0,-1 0 0,1 0 0,9-9 0,39-29 0,-22 19 0,181-170 0,-75 66 0,294-298 0,-403 398 0,-19 20 0,0 0 0,11-14 0,-16 18 0,-1 0 0,0-1 0,1 1 0,-2 0 0,1-1 0,0 1 0,-1-1 0,0 0 0,1-6 0,-1 5 0,0 0 0,-1 0 0,0 0 0,0 1 0,-1-1 0,-1-10 0,1 14 0,1 0 0,-1 0 0,0 1 0,1-1 0,-1 0 0,0 0 0,0 1 0,0-1 0,-1 0 0,1 1 0,0-1 0,-1 1 0,1 0 0,-1-1 0,1 1 0,-1 0 0,1 0 0,-1 0 0,0 0 0,0 0 0,0 0 0,1 1 0,-3-2 0,-6 0 0,1 1 0,0-1 0,-11 1 0,13 1 0,0 0 0,-1-1 0,1 0 0,0 0 0,0-1 0,0 0 0,-7-3 0,0-1 0,0 0 0,-1 1 0,0 1 0,0 1 0,0 0 0,0 0 0,0 2 0,-1 0 0,-16 1 0,10 1 0,15 0 0,0 0 0,0-1 0,0 0 0,0 0 0,0-1 0,0 0 0,-8-2 0,13 2-54,1 0-1,-1 0 0,1 0 1,-1-1-1,1 1 1,0 0-1,-1-1 0,1 1 1,0-1-1,0 1 1,0-1-1,0 0 0,0 1 1,1-1-1,-1 0 0,1 0 1,-1 0-1,1 1 1,-1-1-1,1 0 0,0 0 1,0 0-1,0 0 1,0-3-1,0-8-6771</inkml:trace>
+</inkml:ink>
+</file>
+
+<file path=ppt/ink/ink6.xml><?xml version="1.0" encoding="utf-8"?>
+<inkml:ink xmlns:inkml="http://www.w3.org/2003/InkML">
+  <inkml:definitions>
+    <inkml:context xml:id="ctx0">
+      <inkml:inkSource xml:id="inkSrc0">
+        <inkml:traceFormat>
+          <inkml:channel name="X" type="integer" min="-2.14748E9" max="2.14748E9" units="cm"/>
+          <inkml:channel name="Y" type="integer" min="-2.14748E9" max="2.14748E9" units="cm"/>
+          <inkml:channel name="F" type="integer" max="32767" units="dev"/>
+        </inkml:traceFormat>
+        <inkml:channelProperties>
+          <inkml:channelProperty channel="X" name="resolution" value="1000" units="1/cm"/>
+          <inkml:channelProperty channel="Y" name="resolution" value="1000" units="1/cm"/>
+          <inkml:channelProperty channel="F" name="resolution" value="0" units="1/dev"/>
+        </inkml:channelProperties>
+      </inkml:inkSource>
+      <inkml:timestamp xml:id="ts0" timeString="2025-06-24T19:50:07.816"/>
+    </inkml:context>
+    <inkml:brush xml:id="br0">
+      <inkml:brushProperty name="width" value="0.035" units="cm"/>
+      <inkml:brushProperty name="height" value="0.035" units="cm"/>
+    </inkml:brush>
+  </inkml:definitions>
+  <inkml:trace contextRef="#ctx0" brushRef="#br0">75 1731 24575,'-1'-103'0,"0"-9"0,16-152 0,-8 228 2,1 0 0,1 1 0,2 0 0,24-52-1,78-125-115,69-68-186,50-90 73,-231 367 227,37-62 191,-33 57-143,1 1 0,0 0 0,0 0 0,1 0 0,-1 1 0,10-6 0,-8 7-38,0 0 1,1 0-1,0 1 1,0 1-1,0-1 0,0 1 1,0 1-1,1 0 1,-1 0-1,13 0 0,-5 1-11,0 1-1,0 1 1,0 0-1,0 1 1,17 5-1,-30-7 2,-1 1 0,0 0 0,1 0 0,-1 1 0,0-1 0,1 1 0,-1-1 0,0 1 0,0 0 0,-1 0 0,1 1 0,0-1 0,-1 1 0,5 4 0,-5-4 0,0 0 0,-1 0 0,0 0 0,1 0 0,-1 0 0,0 0 0,-1 1 0,1-1 0,-1 0 0,1 0 0,-1 1 0,0-1 0,0 0 0,0 0 0,0 1 0,-2 3 0,-1 7 0,0 0 0,-2-1 0,1 0 0,-2 0 0,0 0 0,0-1 0,-1 1 0,-12 15 0,-9 6 0,-42 42 0,24-27 0,18-19 0,-195 195 0,194-203 0,0-1 0,-1-1 0,-1-2 0,-41 19 0,14-13 0,-96 27 0,135-47 0,0 0 0,-1-1 0,1 0 0,-1-2 0,0-1 0,-28-2 0,44 2-170,1-1-1,-1 0 0,1 1 1,-1-1-1,1-1 0,-1 1 1,-4-3-1,-2-3-6655</inkml:trace>
+</inkml:ink>
+</file>
+
+<file path=ppt/ink/ink7.xml><?xml version="1.0" encoding="utf-8"?>
+<inkml:ink xmlns:inkml="http://www.w3.org/2003/InkML">
+  <inkml:definitions>
+    <inkml:context xml:id="ctx0">
+      <inkml:inkSource xml:id="inkSrc0">
+        <inkml:traceFormat>
+          <inkml:channel name="X" type="integer" min="-2.14748E9" max="2.14748E9" units="cm"/>
+          <inkml:channel name="Y" type="integer" min="-2.14748E9" max="2.14748E9" units="cm"/>
+          <inkml:channel name="F" type="integer" max="32767" units="dev"/>
+        </inkml:traceFormat>
+        <inkml:channelProperties>
+          <inkml:channelProperty channel="X" name="resolution" value="1000" units="1/cm"/>
+          <inkml:channelProperty channel="Y" name="resolution" value="1000" units="1/cm"/>
+          <inkml:channelProperty channel="F" name="resolution" value="0" units="1/dev"/>
+        </inkml:channelProperties>
+      </inkml:inkSource>
+      <inkml:timestamp xml:id="ts0" timeString="2025-06-24T19:50:09.805"/>
+    </inkml:context>
+    <inkml:brush xml:id="br0">
+      <inkml:brushProperty name="width" value="0.035" units="cm"/>
+      <inkml:brushProperty name="height" value="0.035" units="cm"/>
+    </inkml:brush>
+  </inkml:definitions>
+  <inkml:trace contextRef="#ctx0" brushRef="#br0">1 2378 24575,'19'-438'-2943,"26"10"0,108-525 3030,-143 898 41,43-293 1371,-53 344-1310,1 0 1,-1 0 0,1 0-1,0 0 1,0 1 0,0-1-1,1 0 1,-1 1 0,1-1-1,3-5 1,-4 8-110,-1 0-1,1 1 1,0-1 0,-1 0-1,1 1 1,0-1 0,0 0-1,0 1 1,0-1 0,-1 1-1,1-1 1,0 1 0,0 0 0,0-1-1,0 1 1,0 0 0,2 0-1,-2 0-35,1 0-1,-1 0 1,1 0-1,-1 0 1,1 1-1,-1-1 1,1 1-1,-1-1 0,0 1 1,1 0-1,-1-1 1,0 1-1,1 0 1,1 2-1,4 3-43,0 1 0,0 0 0,-1 0 0,0 1 0,0-1 0,-1 1 0,0 1 0,0-1 0,3 10 0,4 13 0,11 42 0,-7-19 0,106 339-420,16 48-682,110 276-174,-157-460 1117,122 281-58,-167-425 3178,-45-111-2950,0-1 1,-1 1 0,2 0-1,-1 0 1,0 0-1,0-1 1,1 1 0,-1-1-1,0 1 1,1-1-1,0 0 1,-1 1 0,1-1-1,0 0 1,0 0 0,-1 0-1,1 0 1,0 0-1,3 0 1,-3-1-13,-1 1 1,1-1-1,-1 0 1,1 0-1,-1 0 0,0-1 1,1 1-1,-1 0 1,1 0-1,-1-1 0,0 1 1,1-1-1,-1 1 1,0-1-1,0 1 0,1-1 1,-1 0-1,0 0 1,0 0-1,0 0 0,0 0 1,0 0-1,0 0 0,0 0 1,0 0-1,0 0 1,0 0-1,-1-1 0,1 1 1,0-1-1,3-9 1,0 1 0,-1 0 0,0-1 0,2-18 0,-4 23 0,31-286-632,-22 0-8,-10 289 640,-24-868-227,-20 416 227,23 266 729,-70-292 1,61 352-2055,21 100-5501</inkml:trace>
+</inkml:ink>
+</file>
+
+<file path=ppt/ink/ink8.xml><?xml version="1.0" encoding="utf-8"?>
+<inkml:ink xmlns:inkml="http://www.w3.org/2003/InkML">
+  <inkml:definitions>
+    <inkml:context xml:id="ctx0">
+      <inkml:inkSource xml:id="inkSrc0">
+        <inkml:traceFormat>
+          <inkml:channel name="X" type="integer" min="-2.14748E9" max="2.14748E9" units="cm"/>
+          <inkml:channel name="Y" type="integer" min="-2.14748E9" max="2.14748E9" units="cm"/>
+          <inkml:channel name="F" type="integer" max="32767" units="dev"/>
+        </inkml:traceFormat>
+        <inkml:channelProperties>
+          <inkml:channelProperty channel="X" name="resolution" value="1000" units="1/cm"/>
+          <inkml:channelProperty channel="Y" name="resolution" value="1000" units="1/cm"/>
+          <inkml:channelProperty channel="F" name="resolution" value="0" units="1/dev"/>
+        </inkml:channelProperties>
+      </inkml:inkSource>
+      <inkml:timestamp xml:id="ts0" timeString="2025-06-24T19:50:28.184"/>
+    </inkml:context>
+    <inkml:brush xml:id="br0">
+      <inkml:brushProperty name="width" value="0.035" units="cm"/>
+      <inkml:brushProperty name="height" value="0.035" units="cm"/>
+    </inkml:brush>
+  </inkml:definitions>
+  <inkml:trace contextRef="#ctx0" brushRef="#br0">627 68 24575,'0'5'0,"1"21"0,-2-1 0,-5 33 0,4-49 0,0 0 0,-1 0 0,0-1 0,0 1 0,-1-1 0,0 0 0,0 1 0,-1-2 0,-10 15 0,4-9 0,0-1 0,0-1 0,-1 1 0,-1-2 0,0 0 0,-17 11 0,19-15 0,0-1 0,-1 0 0,1 0 0,-1-1 0,0-1 0,-1 0 0,1 0 0,-22 0 0,-2-1 0,1-2 0,-37-4 0,51 1 0,0-1 0,0 0 0,1-1 0,-34-14 0,49 16 0,1 1 0,0-1 0,-1 0 0,1 0 0,0 0 0,1 0 0,-1-1 0,1 0 0,-1 1 0,1-1 0,0 0 0,1-1 0,-1 1 0,1-1 0,0 1 0,0-1 0,0 1 0,0-1 0,1 0 0,0 0 0,0 0 0,0 0 0,0-5 0,1-1 0,-1 1 0,2-1 0,-1 0 0,1 1 0,1-1 0,0 1 0,0 0 0,1 0 0,1-1 0,4-9 0,-4 12 0,1 1 0,0 0 0,0 0 0,1 0 0,0 1 0,0-1 0,0 1 0,1 1 0,-1-1 0,1 1 0,1 1 0,10-6 0,3-1 0,1 2 0,0 1 0,33-8 0,-36 12 0,1 0 0,0 2 0,0 0 0,0 1 0,0 1 0,0 0 0,0 2 0,0 1 0,-1 0 0,1 1 0,-1 1 0,20 8 0,-13-4 0,-18-6 0,-1-1 0,0 1 0,0 0 0,10 6 0,-15-7 0,1 0 0,-1 0 0,0 0 0,0 0 0,0 0 0,0 1 0,0-1 0,0 1 0,0-1 0,-1 1 0,1 0 0,-1-1 0,0 1 0,0 0 0,1 3 0,-1 2 0,1-1 0,-1 1 0,-1-1 0,1 1 0,-1-1 0,0 1 0,-1-1 0,-1 10 0,1-14 0,0 0 0,0 0 0,0 0 0,0 0 0,0-1 0,-1 1 0,1 0 0,-1-1 0,0 1 0,-2 2 0,3-4 0,0 1 0,-1-1 0,1 0 0,-1 0 0,1 0 0,-1 0 0,0 0 0,1 0 0,-1-1 0,0 1 0,0 0 0,0-1 0,1 0 0,-1 1 0,0-1 0,0 0 0,-3 0 0,-3 0-105,1-2 0,-1 1 0,0-1 0,1 0 0,-1 0 0,1-1 0,0 0 0,0-1 0,0 1 0,0-1 0,0-1 0,-8-7 0,4 4-6721</inkml:trace>
+</inkml:ink>
+</file>
+
+<file path=ppt/ink/ink9.xml><?xml version="1.0" encoding="utf-8"?>
+<inkml:ink xmlns:inkml="http://www.w3.org/2003/InkML">
+  <inkml:definitions>
+    <inkml:context xml:id="ctx0">
+      <inkml:inkSource xml:id="inkSrc0">
+        <inkml:traceFormat>
+          <inkml:channel name="X" type="integer" min="-2.14748E9" max="2.14748E9" units="cm"/>
+          <inkml:channel name="Y" type="integer" min="-2.14748E9" max="2.14748E9" units="cm"/>
+          <inkml:channel name="F" type="integer" max="32767" units="dev"/>
+        </inkml:traceFormat>
+        <inkml:channelProperties>
+          <inkml:channelProperty channel="X" name="resolution" value="1000" units="1/cm"/>
+          <inkml:channelProperty channel="Y" name="resolution" value="1000" units="1/cm"/>
+          <inkml:channelProperty channel="F" name="resolution" value="0" units="1/dev"/>
+        </inkml:channelProperties>
+      </inkml:inkSource>
+      <inkml:timestamp xml:id="ts0" timeString="2025-06-24T19:50:30.130"/>
+    </inkml:context>
+    <inkml:brush xml:id="br0">
+      <inkml:brushProperty name="width" value="0.035" units="cm"/>
+      <inkml:brushProperty name="height" value="0.035" units="cm"/>
+    </inkml:brush>
+  </inkml:definitions>
+  <inkml:trace contextRef="#ctx0" brushRef="#br0">0 267 24575,'1'-3'0,"-1"0"0,1 0 0,0 0 0,1-1 0,-1 1 0,0 0 0,1 0 0,0 0 0,-1 1 0,1-1 0,0 0 0,5-3 0,2-7 0,-7 10 0,14-20 0,1 0 0,0 1 0,22-19 0,-28 30 0,44-38 0,-48 44 0,1-1 0,-1 1 0,1 0 0,1 1 0,12-6 0,-18 9 0,0 0 0,0 1 0,0-1 0,0 0 0,0 1 0,0 0 0,0 0 0,0 0 0,0 0 0,0 0 0,0 0 0,0 1 0,0-1 0,-1 1 0,1 0 0,0 0 0,0 0 0,0 0 0,-1 1 0,4 1 0,-3 0 0,0-1 0,0 1 0,0 0 0,0 1 0,0-1 0,-1 0 0,1 1 0,-1-1 0,0 1 0,0 0 0,0 0 0,-1 0 0,2 6 0,45 172 0,-40-141 0,-2-1 0,1 66 0,-9-15 0,3 63 0,-1-152 0,1 0 0,-1 0 0,1 0 0,-1 0 0,1 0 0,0 0 0,0 0 0,0-1 0,0 1 0,0 0 0,2 2 0,-3-4 0,0 0 0,0 1 0,1-1 0,-1 0 0,0 0 0,0 0 0,1 1 0,-1-1 0,0 0 0,0 0 0,1 0 0,-1 0 0,0 1 0,1-1 0,-1 0 0,0 0 0,1 0 0,-1 0 0,0 0 0,1 0 0,-1 0 0,1 0 0,-1 0 0,0 0 0,1 0 0,0-1 0,-1 1 0,1-1 0,0 1 0,-1-1 0,1 1 0,-1-1 0,1 1 0,-1-1 0,0 0 0,1 1 0,-1-1 0,1 0 0,-1 1 0,0-1 0,0 0 0,1 0 0,-1 0 0,19-78 0,2-12 0,4-14 0,-14 65 0,-7 25 0,0 0 0,12-27 0,-14 38 0,1-1 0,-1 1 0,1 0 0,0 0 0,0 1 0,0-1 0,0 1 0,1-1 0,-1 1 0,1 0 0,0 0 0,0 1 0,8-5 0,-11 6 0,0 1 0,1-1 0,-1 0 0,0 1 0,1-1 0,-1 1 0,1-1 0,-1 1 0,1-1 0,-1 1 0,1 0 0,-1 0 0,0 0 0,1 0 0,-1 0 0,1 0 0,-1 1 0,1-1 0,-1 0 0,1 1 0,-1-1 0,1 1 0,-1-1 0,0 1 0,1 0 0,-1-1 0,0 1 0,0 0 0,1 0 0,-1 0 0,0 0 0,0 0 0,0 0 0,0 1 0,0-1 0,-1 0 0,1 0 0,0 1 0,0-1 0,0 3 0,1 3 0,1 0 0,-2 0 0,1 0 0,-1 0 0,0 1 0,0 13 0,-4 312-1365,3-316-5461</inkml:trace>
+</inkml:ink>
 </file>
 
 <file path=ppt/slideLayouts/slideLayout1.xml><?xml version="1.0" encoding="utf-8"?>
@@ -3671,13 +4429,8 @@
           <a:p>
             <a:r>
               <a:rPr lang="en-GB" dirty="0"/>
-              <a:t>The more I think about this the more I think it is the same as MP1, but can only be fixed after MP2 and this thing with the herps is just </a:t>
-            </a:r>
-            <a:r>
-              <a:rPr lang="en-GB"/>
-              <a:t>a by-product</a:t>
-            </a:r>
-            <a:endParaRPr lang="en-GB" dirty="0"/>
+              <a:t>The more I think about this the more I think it is the same as MP1, but can only be fixed after MP2 and this thing with the herps is just a by-product</a:t>
+            </a:r>
           </a:p>
         </p:txBody>
       </p:sp>
@@ -5623,6 +6376,1542 @@
     <p:extLst>
       <p:ext uri="{BB962C8B-B14F-4D97-AF65-F5344CB8AC3E}">
         <p14:creationId xmlns:p14="http://schemas.microsoft.com/office/powerpoint/2010/main" val="1517909434"/>
+      </p:ext>
+    </p:extLst>
+  </p:cSld>
+  <p:clrMapOvr>
+    <a:masterClrMapping/>
+  </p:clrMapOvr>
+</p:sld>
+</file>
+
+<file path=ppt/slides/slide21.xml><?xml version="1.0" encoding="utf-8"?>
+<p:sld xmlns:a="http://schemas.openxmlformats.org/drawingml/2006/main" xmlns:r="http://schemas.openxmlformats.org/officeDocument/2006/relationships" xmlns:p="http://schemas.openxmlformats.org/presentationml/2006/main">
+  <p:cSld>
+    <p:spTree>
+      <p:nvGrpSpPr>
+        <p:cNvPr id="1" name=""/>
+        <p:cNvGrpSpPr/>
+        <p:nvPr/>
+      </p:nvGrpSpPr>
+      <p:grpSpPr>
+        <a:xfrm>
+          <a:off x="0" y="0"/>
+          <a:ext cx="0" cy="0"/>
+          <a:chOff x="0" y="0"/>
+          <a:chExt cx="0" cy="0"/>
+        </a:xfrm>
+      </p:grpSpPr>
+      <mc:AlternateContent xmlns:mc="http://schemas.openxmlformats.org/markup-compatibility/2006">
+        <mc:Choice xmlns:p14="http://schemas.microsoft.com/office/powerpoint/2010/main" Requires="p14">
+          <p:contentPart p14:bwMode="auto" r:id="rId2">
+            <p14:nvContentPartPr>
+              <p14:cNvPr id="11" name="Ink 10">
+                <a:extLst>
+                  <a:ext uri="{FF2B5EF4-FFF2-40B4-BE49-F238E27FC236}">
+                    <a16:creationId xmlns:a16="http://schemas.microsoft.com/office/drawing/2014/main" id="{EB94CD96-919F-EEC0-DAD8-54E523B16D75}"/>
+                  </a:ext>
+                </a:extLst>
+              </p14:cNvPr>
+              <p14:cNvContentPartPr/>
+              <p14:nvPr/>
+            </p14:nvContentPartPr>
+            <p14:xfrm>
+              <a:off x="5204393" y="3500875"/>
+              <a:ext cx="211320" cy="199080"/>
+            </p14:xfrm>
+          </p:contentPart>
+        </mc:Choice>
+        <mc:Fallback>
+          <p:pic>
+            <p:nvPicPr>
+              <p:cNvPr id="11" name="Ink 10">
+                <a:extLst>
+                  <a:ext uri="{FF2B5EF4-FFF2-40B4-BE49-F238E27FC236}">
+                    <a16:creationId xmlns:a16="http://schemas.microsoft.com/office/drawing/2014/main" id="{EB94CD96-919F-EEC0-DAD8-54E523B16D75}"/>
+                  </a:ext>
+                </a:extLst>
+              </p:cNvPr>
+              <p:cNvPicPr/>
+              <p:nvPr/>
+            </p:nvPicPr>
+            <p:blipFill>
+              <a:blip r:embed="rId3"/>
+              <a:stretch>
+                <a:fillRect/>
+              </a:stretch>
+            </p:blipFill>
+            <p:spPr>
+              <a:xfrm>
+                <a:off x="5198273" y="3494755"/>
+                <a:ext cx="223560" cy="211320"/>
+              </a:xfrm>
+              <a:prstGeom prst="rect">
+                <a:avLst/>
+              </a:prstGeom>
+            </p:spPr>
+          </p:pic>
+        </mc:Fallback>
+      </mc:AlternateContent>
+      <mc:AlternateContent xmlns:mc="http://schemas.openxmlformats.org/markup-compatibility/2006">
+        <mc:Choice xmlns:p14="http://schemas.microsoft.com/office/powerpoint/2010/main" Requires="p14">
+          <p:contentPart p14:bwMode="auto" r:id="rId4">
+            <p14:nvContentPartPr>
+              <p14:cNvPr id="30" name="Ink 29">
+                <a:extLst>
+                  <a:ext uri="{FF2B5EF4-FFF2-40B4-BE49-F238E27FC236}">
+                    <a16:creationId xmlns:a16="http://schemas.microsoft.com/office/drawing/2014/main" id="{199B7479-CAAF-5A85-EFE6-EFE6B2D6074C}"/>
+                  </a:ext>
+                </a:extLst>
+              </p14:cNvPr>
+              <p14:cNvContentPartPr/>
+              <p14:nvPr/>
+            </p14:nvContentPartPr>
+            <p14:xfrm>
+              <a:off x="2316473" y="3645955"/>
+              <a:ext cx="3009240" cy="1744560"/>
+            </p14:xfrm>
+          </p:contentPart>
+        </mc:Choice>
+        <mc:Fallback>
+          <p:pic>
+            <p:nvPicPr>
+              <p:cNvPr id="30" name="Ink 29">
+                <a:extLst>
+                  <a:ext uri="{FF2B5EF4-FFF2-40B4-BE49-F238E27FC236}">
+                    <a16:creationId xmlns:a16="http://schemas.microsoft.com/office/drawing/2014/main" id="{199B7479-CAAF-5A85-EFE6-EFE6B2D6074C}"/>
+                  </a:ext>
+                </a:extLst>
+              </p:cNvPr>
+              <p:cNvPicPr/>
+              <p:nvPr/>
+            </p:nvPicPr>
+            <p:blipFill>
+              <a:blip r:embed="rId5"/>
+              <a:stretch>
+                <a:fillRect/>
+              </a:stretch>
+            </p:blipFill>
+            <p:spPr>
+              <a:xfrm>
+                <a:off x="2310353" y="3639835"/>
+                <a:ext cx="3021480" cy="1756800"/>
+              </a:xfrm>
+              <a:prstGeom prst="rect">
+                <a:avLst/>
+              </a:prstGeom>
+            </p:spPr>
+          </p:pic>
+        </mc:Fallback>
+      </mc:AlternateContent>
+      <mc:AlternateContent xmlns:mc="http://schemas.openxmlformats.org/markup-compatibility/2006">
+        <mc:Choice xmlns:p14="http://schemas.microsoft.com/office/powerpoint/2010/main" Requires="p14">
+          <p:contentPart p14:bwMode="auto" r:id="rId6">
+            <p14:nvContentPartPr>
+              <p14:cNvPr id="32" name="Ink 31">
+                <a:extLst>
+                  <a:ext uri="{FF2B5EF4-FFF2-40B4-BE49-F238E27FC236}">
+                    <a16:creationId xmlns:a16="http://schemas.microsoft.com/office/drawing/2014/main" id="{1C4F0420-BCA5-175E-22D8-3BE79EB7E908}"/>
+                  </a:ext>
+                </a:extLst>
+              </p14:cNvPr>
+              <p14:cNvContentPartPr/>
+              <p14:nvPr/>
+            </p14:nvContentPartPr>
+            <p14:xfrm>
+              <a:off x="5325353" y="3634435"/>
+              <a:ext cx="3717000" cy="1761120"/>
+            </p14:xfrm>
+          </p:contentPart>
+        </mc:Choice>
+        <mc:Fallback>
+          <p:pic>
+            <p:nvPicPr>
+              <p:cNvPr id="32" name="Ink 31">
+                <a:extLst>
+                  <a:ext uri="{FF2B5EF4-FFF2-40B4-BE49-F238E27FC236}">
+                    <a16:creationId xmlns:a16="http://schemas.microsoft.com/office/drawing/2014/main" id="{1C4F0420-BCA5-175E-22D8-3BE79EB7E908}"/>
+                  </a:ext>
+                </a:extLst>
+              </p:cNvPr>
+              <p:cNvPicPr/>
+              <p:nvPr/>
+            </p:nvPicPr>
+            <p:blipFill>
+              <a:blip r:embed="rId7"/>
+              <a:stretch>
+                <a:fillRect/>
+              </a:stretch>
+            </p:blipFill>
+            <p:spPr>
+              <a:xfrm>
+                <a:off x="5319233" y="3628315"/>
+                <a:ext cx="3729240" cy="1773360"/>
+              </a:xfrm>
+              <a:prstGeom prst="rect">
+                <a:avLst/>
+              </a:prstGeom>
+            </p:spPr>
+          </p:pic>
+        </mc:Fallback>
+      </mc:AlternateContent>
+      <mc:AlternateContent xmlns:mc="http://schemas.openxmlformats.org/markup-compatibility/2006">
+        <mc:Choice xmlns:p14="http://schemas.microsoft.com/office/powerpoint/2010/main" Requires="p14">
+          <p:contentPart p14:bwMode="auto" r:id="rId8">
+            <p14:nvContentPartPr>
+              <p14:cNvPr id="37" name="Ink 36">
+                <a:extLst>
+                  <a:ext uri="{FF2B5EF4-FFF2-40B4-BE49-F238E27FC236}">
+                    <a16:creationId xmlns:a16="http://schemas.microsoft.com/office/drawing/2014/main" id="{489BD18F-086B-CF65-2ECA-4235B5313242}"/>
+                  </a:ext>
+                </a:extLst>
+              </p14:cNvPr>
+              <p14:cNvContentPartPr/>
+              <p14:nvPr/>
+            </p14:nvContentPartPr>
+            <p14:xfrm>
+              <a:off x="4266953" y="1931995"/>
+              <a:ext cx="690480" cy="2692080"/>
+            </p14:xfrm>
+          </p:contentPart>
+        </mc:Choice>
+        <mc:Fallback>
+          <p:pic>
+            <p:nvPicPr>
+              <p:cNvPr id="37" name="Ink 36">
+                <a:extLst>
+                  <a:ext uri="{FF2B5EF4-FFF2-40B4-BE49-F238E27FC236}">
+                    <a16:creationId xmlns:a16="http://schemas.microsoft.com/office/drawing/2014/main" id="{489BD18F-086B-CF65-2ECA-4235B5313242}"/>
+                  </a:ext>
+                </a:extLst>
+              </p:cNvPr>
+              <p:cNvPicPr/>
+              <p:nvPr/>
+            </p:nvPicPr>
+            <p:blipFill>
+              <a:blip r:embed="rId9"/>
+              <a:stretch>
+                <a:fillRect/>
+              </a:stretch>
+            </p:blipFill>
+            <p:spPr>
+              <a:xfrm>
+                <a:off x="4260833" y="1925875"/>
+                <a:ext cx="702720" cy="2704320"/>
+              </a:xfrm>
+              <a:prstGeom prst="rect">
+                <a:avLst/>
+              </a:prstGeom>
+            </p:spPr>
+          </p:pic>
+        </mc:Fallback>
+      </mc:AlternateContent>
+      <p:grpSp>
+        <p:nvGrpSpPr>
+          <p:cNvPr id="39" name="Group 38">
+            <a:extLst>
+              <a:ext uri="{FF2B5EF4-FFF2-40B4-BE49-F238E27FC236}">
+                <a16:creationId xmlns:a16="http://schemas.microsoft.com/office/drawing/2014/main" id="{39267046-B017-E8E7-12D5-F936BEAB7000}"/>
+              </a:ext>
+            </a:extLst>
+          </p:cNvPr>
+          <p:cNvGrpSpPr/>
+          <p:nvPr/>
+        </p:nvGrpSpPr>
+        <p:grpSpPr>
+          <a:xfrm>
+            <a:off x="1857113" y="-59597"/>
+            <a:ext cx="7866000" cy="5976792"/>
+            <a:chOff x="1857113" y="-59597"/>
+            <a:chExt cx="7866000" cy="5976792"/>
+          </a:xfrm>
+        </p:grpSpPr>
+        <mc:AlternateContent xmlns:mc="http://schemas.openxmlformats.org/markup-compatibility/2006">
+          <mc:Choice xmlns:p14="http://schemas.microsoft.com/office/powerpoint/2010/main" Requires="p14">
+            <p:contentPart p14:bwMode="auto" r:id="rId10">
+              <p14:nvContentPartPr>
+                <p14:cNvPr id="4" name="Ink 3">
+                  <a:extLst>
+                    <a:ext uri="{FF2B5EF4-FFF2-40B4-BE49-F238E27FC236}">
+                      <a16:creationId xmlns:a16="http://schemas.microsoft.com/office/drawing/2014/main" id="{3C941ECD-ED77-C8BC-1781-394FD31C4515}"/>
+                    </a:ext>
+                  </a:extLst>
+                </p14:cNvPr>
+                <p14:cNvContentPartPr/>
+                <p14:nvPr/>
+              </p14:nvContentPartPr>
+              <p14:xfrm>
+                <a:off x="2520233" y="793243"/>
+                <a:ext cx="6530400" cy="4624920"/>
+              </p14:xfrm>
+            </p:contentPart>
+          </mc:Choice>
+          <mc:Fallback>
+            <p:pic>
+              <p:nvPicPr>
+                <p:cNvPr id="4" name="Ink 3">
+                  <a:extLst>
+                    <a:ext uri="{FF2B5EF4-FFF2-40B4-BE49-F238E27FC236}">
+                      <a16:creationId xmlns:a16="http://schemas.microsoft.com/office/drawing/2014/main" id="{3C941ECD-ED77-C8BC-1781-394FD31C4515}"/>
+                    </a:ext>
+                  </a:extLst>
+                </p:cNvPr>
+                <p:cNvPicPr/>
+                <p:nvPr/>
+              </p:nvPicPr>
+              <p:blipFill>
+                <a:blip r:embed="rId11"/>
+                <a:stretch>
+                  <a:fillRect/>
+                </a:stretch>
+              </p:blipFill>
+              <p:spPr>
+                <a:xfrm>
+                  <a:off x="2514113" y="787123"/>
+                  <a:ext cx="6542640" cy="4637160"/>
+                </a:xfrm>
+                <a:prstGeom prst="rect">
+                  <a:avLst/>
+                </a:prstGeom>
+              </p:spPr>
+            </p:pic>
+          </mc:Fallback>
+        </mc:AlternateContent>
+        <mc:AlternateContent xmlns:mc="http://schemas.openxmlformats.org/markup-compatibility/2006">
+          <mc:Choice xmlns:p14="http://schemas.microsoft.com/office/powerpoint/2010/main" Requires="p14">
+            <p:contentPart p14:bwMode="auto" r:id="rId12">
+              <p14:nvContentPartPr>
+                <p14:cNvPr id="5" name="Ink 4">
+                  <a:extLst>
+                    <a:ext uri="{FF2B5EF4-FFF2-40B4-BE49-F238E27FC236}">
+                      <a16:creationId xmlns:a16="http://schemas.microsoft.com/office/drawing/2014/main" id="{5A545D09-BFB0-696C-D335-4E2DE7A7BF44}"/>
+                    </a:ext>
+                  </a:extLst>
+                </p14:cNvPr>
+                <p14:cNvContentPartPr/>
+                <p14:nvPr/>
+              </p14:nvContentPartPr>
+              <p14:xfrm>
+                <a:off x="5022593" y="-59597"/>
+                <a:ext cx="384840" cy="623160"/>
+              </p14:xfrm>
+            </p:contentPart>
+          </mc:Choice>
+          <mc:Fallback>
+            <p:pic>
+              <p:nvPicPr>
+                <p:cNvPr id="5" name="Ink 4">
+                  <a:extLst>
+                    <a:ext uri="{FF2B5EF4-FFF2-40B4-BE49-F238E27FC236}">
+                      <a16:creationId xmlns:a16="http://schemas.microsoft.com/office/drawing/2014/main" id="{5A545D09-BFB0-696C-D335-4E2DE7A7BF44}"/>
+                    </a:ext>
+                  </a:extLst>
+                </p:cNvPr>
+                <p:cNvPicPr/>
+                <p:nvPr/>
+              </p:nvPicPr>
+              <p:blipFill>
+                <a:blip r:embed="rId13"/>
+                <a:stretch>
+                  <a:fillRect/>
+                </a:stretch>
+              </p:blipFill>
+              <p:spPr>
+                <a:xfrm>
+                  <a:off x="5016473" y="-65717"/>
+                  <a:ext cx="397080" cy="635400"/>
+                </a:xfrm>
+                <a:prstGeom prst="rect">
+                  <a:avLst/>
+                </a:prstGeom>
+              </p:spPr>
+            </p:pic>
+          </mc:Fallback>
+        </mc:AlternateContent>
+        <mc:AlternateContent xmlns:mc="http://schemas.openxmlformats.org/markup-compatibility/2006">
+          <mc:Choice xmlns:p14="http://schemas.microsoft.com/office/powerpoint/2010/main" Requires="p14">
+            <p:contentPart p14:bwMode="auto" r:id="rId14">
+              <p14:nvContentPartPr>
+                <p14:cNvPr id="7" name="Ink 6">
+                  <a:extLst>
+                    <a:ext uri="{FF2B5EF4-FFF2-40B4-BE49-F238E27FC236}">
+                      <a16:creationId xmlns:a16="http://schemas.microsoft.com/office/drawing/2014/main" id="{56C2A9AA-74D6-44DB-6DEC-E2BAA36872AA}"/>
+                    </a:ext>
+                  </a:extLst>
+                </p14:cNvPr>
+                <p14:cNvContentPartPr/>
+                <p14:nvPr/>
+              </p14:nvContentPartPr>
+              <p14:xfrm>
+                <a:off x="1857113" y="4894795"/>
+                <a:ext cx="517680" cy="1022400"/>
+              </p14:xfrm>
+            </p:contentPart>
+          </mc:Choice>
+          <mc:Fallback>
+            <p:pic>
+              <p:nvPicPr>
+                <p:cNvPr id="7" name="Ink 6">
+                  <a:extLst>
+                    <a:ext uri="{FF2B5EF4-FFF2-40B4-BE49-F238E27FC236}">
+                      <a16:creationId xmlns:a16="http://schemas.microsoft.com/office/drawing/2014/main" id="{56C2A9AA-74D6-44DB-6DEC-E2BAA36872AA}"/>
+                    </a:ext>
+                  </a:extLst>
+                </p:cNvPr>
+                <p:cNvPicPr/>
+                <p:nvPr/>
+              </p:nvPicPr>
+              <p:blipFill>
+                <a:blip r:embed="rId15"/>
+                <a:stretch>
+                  <a:fillRect/>
+                </a:stretch>
+              </p:blipFill>
+              <p:spPr>
+                <a:xfrm>
+                  <a:off x="1850993" y="4888675"/>
+                  <a:ext cx="529920" cy="1034640"/>
+                </a:xfrm>
+                <a:prstGeom prst="rect">
+                  <a:avLst/>
+                </a:prstGeom>
+              </p:spPr>
+            </p:pic>
+          </mc:Fallback>
+        </mc:AlternateContent>
+        <mc:AlternateContent xmlns:mc="http://schemas.openxmlformats.org/markup-compatibility/2006">
+          <mc:Choice xmlns:p14="http://schemas.microsoft.com/office/powerpoint/2010/main" Requires="p14">
+            <p:contentPart p14:bwMode="auto" r:id="rId16">
+              <p14:nvContentPartPr>
+                <p14:cNvPr id="17" name="Ink 16">
+                  <a:extLst>
+                    <a:ext uri="{FF2B5EF4-FFF2-40B4-BE49-F238E27FC236}">
+                      <a16:creationId xmlns:a16="http://schemas.microsoft.com/office/drawing/2014/main" id="{2641C2BB-1FED-D88D-4214-D5DECCAD7F01}"/>
+                    </a:ext>
+                  </a:extLst>
+                </p14:cNvPr>
+                <p14:cNvContentPartPr/>
+                <p14:nvPr/>
+              </p14:nvContentPartPr>
+              <p14:xfrm>
+                <a:off x="5013233" y="700075"/>
+                <a:ext cx="226080" cy="147240"/>
+              </p14:xfrm>
+            </p:contentPart>
+          </mc:Choice>
+          <mc:Fallback>
+            <p:pic>
+              <p:nvPicPr>
+                <p:cNvPr id="17" name="Ink 16">
+                  <a:extLst>
+                    <a:ext uri="{FF2B5EF4-FFF2-40B4-BE49-F238E27FC236}">
+                      <a16:creationId xmlns:a16="http://schemas.microsoft.com/office/drawing/2014/main" id="{2641C2BB-1FED-D88D-4214-D5DECCAD7F01}"/>
+                    </a:ext>
+                  </a:extLst>
+                </p:cNvPr>
+                <p:cNvPicPr/>
+                <p:nvPr/>
+              </p:nvPicPr>
+              <p:blipFill>
+                <a:blip r:embed="rId17"/>
+                <a:stretch>
+                  <a:fillRect/>
+                </a:stretch>
+              </p:blipFill>
+              <p:spPr>
+                <a:xfrm>
+                  <a:off x="5007113" y="693955"/>
+                  <a:ext cx="238320" cy="159480"/>
+                </a:xfrm>
+                <a:prstGeom prst="rect">
+                  <a:avLst/>
+                </a:prstGeom>
+              </p:spPr>
+            </p:pic>
+          </mc:Fallback>
+        </mc:AlternateContent>
+        <mc:AlternateContent xmlns:mc="http://schemas.openxmlformats.org/markup-compatibility/2006">
+          <mc:Choice xmlns:p14="http://schemas.microsoft.com/office/powerpoint/2010/main" Requires="p14">
+            <p:contentPart p14:bwMode="auto" r:id="rId18">
+              <p14:nvContentPartPr>
+                <p14:cNvPr id="18" name="Ink 17">
+                  <a:extLst>
+                    <a:ext uri="{FF2B5EF4-FFF2-40B4-BE49-F238E27FC236}">
+                      <a16:creationId xmlns:a16="http://schemas.microsoft.com/office/drawing/2014/main" id="{D49D1719-FAD5-4F69-8916-B6FD32689437}"/>
+                    </a:ext>
+                  </a:extLst>
+                </p14:cNvPr>
+                <p14:cNvContentPartPr/>
+                <p14:nvPr/>
+              </p14:nvContentPartPr>
+              <p14:xfrm>
+                <a:off x="5422913" y="686035"/>
+                <a:ext cx="237600" cy="254880"/>
+              </p14:xfrm>
+            </p:contentPart>
+          </mc:Choice>
+          <mc:Fallback>
+            <p:pic>
+              <p:nvPicPr>
+                <p:cNvPr id="18" name="Ink 17">
+                  <a:extLst>
+                    <a:ext uri="{FF2B5EF4-FFF2-40B4-BE49-F238E27FC236}">
+                      <a16:creationId xmlns:a16="http://schemas.microsoft.com/office/drawing/2014/main" id="{D49D1719-FAD5-4F69-8916-B6FD32689437}"/>
+                    </a:ext>
+                  </a:extLst>
+                </p:cNvPr>
+                <p:cNvPicPr/>
+                <p:nvPr/>
+              </p:nvPicPr>
+              <p:blipFill>
+                <a:blip r:embed="rId19"/>
+                <a:stretch>
+                  <a:fillRect/>
+                </a:stretch>
+              </p:blipFill>
+              <p:spPr>
+                <a:xfrm>
+                  <a:off x="5416793" y="679915"/>
+                  <a:ext cx="249840" cy="267120"/>
+                </a:xfrm>
+                <a:prstGeom prst="rect">
+                  <a:avLst/>
+                </a:prstGeom>
+              </p:spPr>
+            </p:pic>
+          </mc:Fallback>
+        </mc:AlternateContent>
+        <mc:AlternateContent xmlns:mc="http://schemas.openxmlformats.org/markup-compatibility/2006">
+          <mc:Choice xmlns:p14="http://schemas.microsoft.com/office/powerpoint/2010/main" Requires="p14">
+            <p:contentPart p14:bwMode="auto" r:id="rId20">
+              <p14:nvContentPartPr>
+                <p14:cNvPr id="19" name="Ink 18">
+                  <a:extLst>
+                    <a:ext uri="{FF2B5EF4-FFF2-40B4-BE49-F238E27FC236}">
+                      <a16:creationId xmlns:a16="http://schemas.microsoft.com/office/drawing/2014/main" id="{A6401109-0A11-CA67-3A1B-58B058973247}"/>
+                    </a:ext>
+                  </a:extLst>
+                </p14:cNvPr>
+                <p14:cNvContentPartPr/>
+                <p14:nvPr/>
+              </p14:nvContentPartPr>
+              <p14:xfrm>
+                <a:off x="5720633" y="799435"/>
+                <a:ext cx="639000" cy="288360"/>
+              </p14:xfrm>
+            </p:contentPart>
+          </mc:Choice>
+          <mc:Fallback>
+            <p:pic>
+              <p:nvPicPr>
+                <p:cNvPr id="19" name="Ink 18">
+                  <a:extLst>
+                    <a:ext uri="{FF2B5EF4-FFF2-40B4-BE49-F238E27FC236}">
+                      <a16:creationId xmlns:a16="http://schemas.microsoft.com/office/drawing/2014/main" id="{A6401109-0A11-CA67-3A1B-58B058973247}"/>
+                    </a:ext>
+                  </a:extLst>
+                </p:cNvPr>
+                <p:cNvPicPr/>
+                <p:nvPr/>
+              </p:nvPicPr>
+              <p:blipFill>
+                <a:blip r:embed="rId21"/>
+                <a:stretch>
+                  <a:fillRect/>
+                </a:stretch>
+              </p:blipFill>
+              <p:spPr>
+                <a:xfrm>
+                  <a:off x="5714513" y="793315"/>
+                  <a:ext cx="651240" cy="300600"/>
+                </a:xfrm>
+                <a:prstGeom prst="rect">
+                  <a:avLst/>
+                </a:prstGeom>
+              </p:spPr>
+            </p:pic>
+          </mc:Fallback>
+        </mc:AlternateContent>
+        <mc:AlternateContent xmlns:mc="http://schemas.openxmlformats.org/markup-compatibility/2006">
+          <mc:Choice xmlns:p14="http://schemas.microsoft.com/office/powerpoint/2010/main" Requires="p14">
+            <p:contentPart p14:bwMode="auto" r:id="rId22">
+              <p14:nvContentPartPr>
+                <p14:cNvPr id="20" name="Ink 19">
+                  <a:extLst>
+                    <a:ext uri="{FF2B5EF4-FFF2-40B4-BE49-F238E27FC236}">
+                      <a16:creationId xmlns:a16="http://schemas.microsoft.com/office/drawing/2014/main" id="{6D70348F-EB8F-46C0-DC14-C119C10B3806}"/>
+                    </a:ext>
+                  </a:extLst>
+                </p14:cNvPr>
+                <p14:cNvContentPartPr/>
+                <p14:nvPr/>
+              </p14:nvContentPartPr>
+              <p14:xfrm>
+                <a:off x="6481313" y="1012555"/>
+                <a:ext cx="606960" cy="635040"/>
+              </p14:xfrm>
+            </p:contentPart>
+          </mc:Choice>
+          <mc:Fallback>
+            <p:pic>
+              <p:nvPicPr>
+                <p:cNvPr id="20" name="Ink 19">
+                  <a:extLst>
+                    <a:ext uri="{FF2B5EF4-FFF2-40B4-BE49-F238E27FC236}">
+                      <a16:creationId xmlns:a16="http://schemas.microsoft.com/office/drawing/2014/main" id="{6D70348F-EB8F-46C0-DC14-C119C10B3806}"/>
+                    </a:ext>
+                  </a:extLst>
+                </p:cNvPr>
+                <p:cNvPicPr/>
+                <p:nvPr/>
+              </p:nvPicPr>
+              <p:blipFill>
+                <a:blip r:embed="rId23"/>
+                <a:stretch>
+                  <a:fillRect/>
+                </a:stretch>
+              </p:blipFill>
+              <p:spPr>
+                <a:xfrm>
+                  <a:off x="6475193" y="1006435"/>
+                  <a:ext cx="619200" cy="647280"/>
+                </a:xfrm>
+                <a:prstGeom prst="rect">
+                  <a:avLst/>
+                </a:prstGeom>
+              </p:spPr>
+            </p:pic>
+          </mc:Fallback>
+        </mc:AlternateContent>
+        <mc:AlternateContent xmlns:mc="http://schemas.openxmlformats.org/markup-compatibility/2006">
+          <mc:Choice xmlns:p14="http://schemas.microsoft.com/office/powerpoint/2010/main" Requires="p14">
+            <p:contentPart p14:bwMode="auto" r:id="rId24">
+              <p14:nvContentPartPr>
+                <p14:cNvPr id="21" name="Ink 20">
+                  <a:extLst>
+                    <a:ext uri="{FF2B5EF4-FFF2-40B4-BE49-F238E27FC236}">
+                      <a16:creationId xmlns:a16="http://schemas.microsoft.com/office/drawing/2014/main" id="{5CD05EB9-4E96-5544-C728-ABF23CD95F20}"/>
+                    </a:ext>
+                  </a:extLst>
+                </p14:cNvPr>
+                <p14:cNvContentPartPr/>
+                <p14:nvPr/>
+              </p14:nvContentPartPr>
+              <p14:xfrm>
+                <a:off x="6673553" y="1184635"/>
+                <a:ext cx="239400" cy="330840"/>
+              </p14:xfrm>
+            </p:contentPart>
+          </mc:Choice>
+          <mc:Fallback>
+            <p:pic>
+              <p:nvPicPr>
+                <p:cNvPr id="21" name="Ink 20">
+                  <a:extLst>
+                    <a:ext uri="{FF2B5EF4-FFF2-40B4-BE49-F238E27FC236}">
+                      <a16:creationId xmlns:a16="http://schemas.microsoft.com/office/drawing/2014/main" id="{5CD05EB9-4E96-5544-C728-ABF23CD95F20}"/>
+                    </a:ext>
+                  </a:extLst>
+                </p:cNvPr>
+                <p:cNvPicPr/>
+                <p:nvPr/>
+              </p:nvPicPr>
+              <p:blipFill>
+                <a:blip r:embed="rId25"/>
+                <a:stretch>
+                  <a:fillRect/>
+                </a:stretch>
+              </p:blipFill>
+              <p:spPr>
+                <a:xfrm>
+                  <a:off x="6667433" y="1178515"/>
+                  <a:ext cx="251640" cy="343080"/>
+                </a:xfrm>
+                <a:prstGeom prst="rect">
+                  <a:avLst/>
+                </a:prstGeom>
+              </p:spPr>
+            </p:pic>
+          </mc:Fallback>
+        </mc:AlternateContent>
+        <mc:AlternateContent xmlns:mc="http://schemas.openxmlformats.org/markup-compatibility/2006">
+          <mc:Choice xmlns:p14="http://schemas.microsoft.com/office/powerpoint/2010/main" Requires="p14">
+            <p:contentPart p14:bwMode="auto" r:id="rId26">
+              <p14:nvContentPartPr>
+                <p14:cNvPr id="23" name="Ink 22">
+                  <a:extLst>
+                    <a:ext uri="{FF2B5EF4-FFF2-40B4-BE49-F238E27FC236}">
+                      <a16:creationId xmlns:a16="http://schemas.microsoft.com/office/drawing/2014/main" id="{CB3EB7BD-427E-7AA1-2372-8D9844475B6B}"/>
+                    </a:ext>
+                  </a:extLst>
+                </p14:cNvPr>
+                <p14:cNvContentPartPr/>
+                <p14:nvPr/>
+              </p14:nvContentPartPr>
+              <p14:xfrm>
+                <a:off x="5198993" y="816355"/>
+                <a:ext cx="138240" cy="2792520"/>
+              </p14:xfrm>
+            </p:contentPart>
+          </mc:Choice>
+          <mc:Fallback>
+            <p:pic>
+              <p:nvPicPr>
+                <p:cNvPr id="23" name="Ink 22">
+                  <a:extLst>
+                    <a:ext uri="{FF2B5EF4-FFF2-40B4-BE49-F238E27FC236}">
+                      <a16:creationId xmlns:a16="http://schemas.microsoft.com/office/drawing/2014/main" id="{CB3EB7BD-427E-7AA1-2372-8D9844475B6B}"/>
+                    </a:ext>
+                  </a:extLst>
+                </p:cNvPr>
+                <p:cNvPicPr/>
+                <p:nvPr/>
+              </p:nvPicPr>
+              <p:blipFill>
+                <a:blip r:embed="rId27"/>
+                <a:stretch>
+                  <a:fillRect/>
+                </a:stretch>
+              </p:blipFill>
+              <p:spPr>
+                <a:xfrm>
+                  <a:off x="5192873" y="810235"/>
+                  <a:ext cx="150480" cy="2804760"/>
+                </a:xfrm>
+                <a:prstGeom prst="rect">
+                  <a:avLst/>
+                </a:prstGeom>
+              </p:spPr>
+            </p:pic>
+          </mc:Fallback>
+        </mc:AlternateContent>
+        <mc:AlternateContent xmlns:mc="http://schemas.openxmlformats.org/markup-compatibility/2006">
+          <mc:Choice xmlns:p14="http://schemas.microsoft.com/office/powerpoint/2010/main" Requires="p14">
+            <p:contentPart p14:bwMode="auto" r:id="rId28">
+              <p14:nvContentPartPr>
+                <p14:cNvPr id="25" name="Ink 24">
+                  <a:extLst>
+                    <a:ext uri="{FF2B5EF4-FFF2-40B4-BE49-F238E27FC236}">
+                      <a16:creationId xmlns:a16="http://schemas.microsoft.com/office/drawing/2014/main" id="{C75F3768-DE86-9B35-09F9-72D248F44744}"/>
+                    </a:ext>
+                  </a:extLst>
+                </p14:cNvPr>
+                <p14:cNvContentPartPr/>
+                <p14:nvPr/>
+              </p14:nvContentPartPr>
+              <p14:xfrm>
+                <a:off x="4100273" y="833995"/>
+                <a:ext cx="10440" cy="518760"/>
+              </p14:xfrm>
+            </p:contentPart>
+          </mc:Choice>
+          <mc:Fallback>
+            <p:pic>
+              <p:nvPicPr>
+                <p:cNvPr id="25" name="Ink 24">
+                  <a:extLst>
+                    <a:ext uri="{FF2B5EF4-FFF2-40B4-BE49-F238E27FC236}">
+                      <a16:creationId xmlns:a16="http://schemas.microsoft.com/office/drawing/2014/main" id="{C75F3768-DE86-9B35-09F9-72D248F44744}"/>
+                    </a:ext>
+                  </a:extLst>
+                </p:cNvPr>
+                <p:cNvPicPr/>
+                <p:nvPr/>
+              </p:nvPicPr>
+              <p:blipFill>
+                <a:blip r:embed="rId29"/>
+                <a:stretch>
+                  <a:fillRect/>
+                </a:stretch>
+              </p:blipFill>
+              <p:spPr>
+                <a:xfrm>
+                  <a:off x="4094153" y="827875"/>
+                  <a:ext cx="22680" cy="531000"/>
+                </a:xfrm>
+                <a:prstGeom prst="rect">
+                  <a:avLst/>
+                </a:prstGeom>
+              </p:spPr>
+            </p:pic>
+          </mc:Fallback>
+        </mc:AlternateContent>
+        <mc:AlternateContent xmlns:mc="http://schemas.openxmlformats.org/markup-compatibility/2006">
+          <mc:Choice xmlns:p14="http://schemas.microsoft.com/office/powerpoint/2010/main" Requires="p14">
+            <p:contentPart p14:bwMode="auto" r:id="rId30">
+              <p14:nvContentPartPr>
+                <p14:cNvPr id="26" name="Ink 25">
+                  <a:extLst>
+                    <a:ext uri="{FF2B5EF4-FFF2-40B4-BE49-F238E27FC236}">
+                      <a16:creationId xmlns:a16="http://schemas.microsoft.com/office/drawing/2014/main" id="{5FA932E0-0C8D-17AB-DBD6-342F3754230D}"/>
+                    </a:ext>
+                  </a:extLst>
+                </p14:cNvPr>
+                <p14:cNvContentPartPr/>
+                <p14:nvPr/>
+              </p14:nvContentPartPr>
+              <p14:xfrm>
+                <a:off x="4412033" y="859555"/>
+                <a:ext cx="230760" cy="388800"/>
+              </p14:xfrm>
+            </p:contentPart>
+          </mc:Choice>
+          <mc:Fallback>
+            <p:pic>
+              <p:nvPicPr>
+                <p:cNvPr id="26" name="Ink 25">
+                  <a:extLst>
+                    <a:ext uri="{FF2B5EF4-FFF2-40B4-BE49-F238E27FC236}">
+                      <a16:creationId xmlns:a16="http://schemas.microsoft.com/office/drawing/2014/main" id="{5FA932E0-0C8D-17AB-DBD6-342F3754230D}"/>
+                    </a:ext>
+                  </a:extLst>
+                </p:cNvPr>
+                <p:cNvPicPr/>
+                <p:nvPr/>
+              </p:nvPicPr>
+              <p:blipFill>
+                <a:blip r:embed="rId31"/>
+                <a:stretch>
+                  <a:fillRect/>
+                </a:stretch>
+              </p:blipFill>
+              <p:spPr>
+                <a:xfrm>
+                  <a:off x="4405913" y="853435"/>
+                  <a:ext cx="243000" cy="401040"/>
+                </a:xfrm>
+                <a:prstGeom prst="rect">
+                  <a:avLst/>
+                </a:prstGeom>
+              </p:spPr>
+            </p:pic>
+          </mc:Fallback>
+        </mc:AlternateContent>
+        <mc:AlternateContent xmlns:mc="http://schemas.openxmlformats.org/markup-compatibility/2006">
+          <mc:Choice xmlns:p14="http://schemas.microsoft.com/office/powerpoint/2010/main" Requires="p14">
+            <p:contentPart p14:bwMode="auto" r:id="rId32">
+              <p14:nvContentPartPr>
+                <p14:cNvPr id="27" name="Ink 26">
+                  <a:extLst>
+                    <a:ext uri="{FF2B5EF4-FFF2-40B4-BE49-F238E27FC236}">
+                      <a16:creationId xmlns:a16="http://schemas.microsoft.com/office/drawing/2014/main" id="{EF9D74C5-1125-5FC9-E1A3-2410D4EE0CA1}"/>
+                    </a:ext>
+                  </a:extLst>
+                </p14:cNvPr>
+                <p14:cNvContentPartPr/>
+                <p14:nvPr/>
+              </p14:nvContentPartPr>
+              <p14:xfrm>
+                <a:off x="4599593" y="1095355"/>
+                <a:ext cx="215280" cy="291960"/>
+              </p14:xfrm>
+            </p:contentPart>
+          </mc:Choice>
+          <mc:Fallback>
+            <p:pic>
+              <p:nvPicPr>
+                <p:cNvPr id="27" name="Ink 26">
+                  <a:extLst>
+                    <a:ext uri="{FF2B5EF4-FFF2-40B4-BE49-F238E27FC236}">
+                      <a16:creationId xmlns:a16="http://schemas.microsoft.com/office/drawing/2014/main" id="{EF9D74C5-1125-5FC9-E1A3-2410D4EE0CA1}"/>
+                    </a:ext>
+                  </a:extLst>
+                </p:cNvPr>
+                <p:cNvPicPr/>
+                <p:nvPr/>
+              </p:nvPicPr>
+              <p:blipFill>
+                <a:blip r:embed="rId33"/>
+                <a:stretch>
+                  <a:fillRect/>
+                </a:stretch>
+              </p:blipFill>
+              <p:spPr>
+                <a:xfrm>
+                  <a:off x="4593473" y="1089235"/>
+                  <a:ext cx="227520" cy="304200"/>
+                </a:xfrm>
+                <a:prstGeom prst="rect">
+                  <a:avLst/>
+                </a:prstGeom>
+              </p:spPr>
+            </p:pic>
+          </mc:Fallback>
+        </mc:AlternateContent>
+        <mc:AlternateContent xmlns:mc="http://schemas.openxmlformats.org/markup-compatibility/2006">
+          <mc:Choice xmlns:p14="http://schemas.microsoft.com/office/powerpoint/2010/main" Requires="p14">
+            <p:contentPart p14:bwMode="auto" r:id="rId34">
+              <p14:nvContentPartPr>
+                <p14:cNvPr id="29" name="Ink 28">
+                  <a:extLst>
+                    <a:ext uri="{FF2B5EF4-FFF2-40B4-BE49-F238E27FC236}">
+                      <a16:creationId xmlns:a16="http://schemas.microsoft.com/office/drawing/2014/main" id="{CBA62F6A-92A8-9D52-7E72-14FA28892178}"/>
+                    </a:ext>
+                  </a:extLst>
+                </p14:cNvPr>
+                <p14:cNvContentPartPr/>
+                <p14:nvPr/>
+              </p14:nvContentPartPr>
+              <p14:xfrm>
+                <a:off x="4557113" y="3496195"/>
+                <a:ext cx="269280" cy="392040"/>
+              </p14:xfrm>
+            </p:contentPart>
+          </mc:Choice>
+          <mc:Fallback>
+            <p:pic>
+              <p:nvPicPr>
+                <p:cNvPr id="29" name="Ink 28">
+                  <a:extLst>
+                    <a:ext uri="{FF2B5EF4-FFF2-40B4-BE49-F238E27FC236}">
+                      <a16:creationId xmlns:a16="http://schemas.microsoft.com/office/drawing/2014/main" id="{CBA62F6A-92A8-9D52-7E72-14FA28892178}"/>
+                    </a:ext>
+                  </a:extLst>
+                </p:cNvPr>
+                <p:cNvPicPr/>
+                <p:nvPr/>
+              </p:nvPicPr>
+              <p:blipFill>
+                <a:blip r:embed="rId35"/>
+                <a:stretch>
+                  <a:fillRect/>
+                </a:stretch>
+              </p:blipFill>
+              <p:spPr>
+                <a:xfrm>
+                  <a:off x="4550993" y="3490075"/>
+                  <a:ext cx="281520" cy="404280"/>
+                </a:xfrm>
+                <a:prstGeom prst="rect">
+                  <a:avLst/>
+                </a:prstGeom>
+              </p:spPr>
+            </p:pic>
+          </mc:Fallback>
+        </mc:AlternateContent>
+        <mc:AlternateContent xmlns:mc="http://schemas.openxmlformats.org/markup-compatibility/2006">
+          <mc:Choice xmlns:p14="http://schemas.microsoft.com/office/powerpoint/2010/main" Requires="p14">
+            <p:contentPart p14:bwMode="auto" r:id="rId36">
+              <p14:nvContentPartPr>
+                <p14:cNvPr id="8" name="Ink 7">
+                  <a:extLst>
+                    <a:ext uri="{FF2B5EF4-FFF2-40B4-BE49-F238E27FC236}">
+                      <a16:creationId xmlns:a16="http://schemas.microsoft.com/office/drawing/2014/main" id="{D923B1FA-2F20-99F3-F20E-CEF4D1E2DFE2}"/>
+                    </a:ext>
+                  </a:extLst>
+                </p14:cNvPr>
+                <p14:cNvContentPartPr/>
+                <p14:nvPr/>
+              </p14:nvContentPartPr>
+              <p14:xfrm>
+                <a:off x="9241793" y="4796875"/>
+                <a:ext cx="456120" cy="977040"/>
+              </p14:xfrm>
+            </p:contentPart>
+          </mc:Choice>
+          <mc:Fallback>
+            <p:pic>
+              <p:nvPicPr>
+                <p:cNvPr id="8" name="Ink 7">
+                  <a:extLst>
+                    <a:ext uri="{FF2B5EF4-FFF2-40B4-BE49-F238E27FC236}">
+                      <a16:creationId xmlns:a16="http://schemas.microsoft.com/office/drawing/2014/main" id="{D923B1FA-2F20-99F3-F20E-CEF4D1E2DFE2}"/>
+                    </a:ext>
+                  </a:extLst>
+                </p:cNvPr>
+                <p:cNvPicPr/>
+                <p:nvPr/>
+              </p:nvPicPr>
+              <p:blipFill>
+                <a:blip r:embed="rId37"/>
+                <a:stretch>
+                  <a:fillRect/>
+                </a:stretch>
+              </p:blipFill>
+              <p:spPr>
+                <a:xfrm>
+                  <a:off x="9235673" y="4790755"/>
+                  <a:ext cx="468360" cy="989280"/>
+                </a:xfrm>
+                <a:prstGeom prst="rect">
+                  <a:avLst/>
+                </a:prstGeom>
+              </p:spPr>
+            </p:pic>
+          </mc:Fallback>
+        </mc:AlternateContent>
+        <mc:AlternateContent xmlns:mc="http://schemas.openxmlformats.org/markup-compatibility/2006">
+          <mc:Choice xmlns:p14="http://schemas.microsoft.com/office/powerpoint/2010/main" Requires="p14">
+            <p:contentPart p14:bwMode="auto" r:id="rId38">
+              <p14:nvContentPartPr>
+                <p14:cNvPr id="9" name="Ink 8">
+                  <a:extLst>
+                    <a:ext uri="{FF2B5EF4-FFF2-40B4-BE49-F238E27FC236}">
+                      <a16:creationId xmlns:a16="http://schemas.microsoft.com/office/drawing/2014/main" id="{B7D0ED90-E418-70AD-25D1-BCD295A436CC}"/>
+                    </a:ext>
+                  </a:extLst>
+                </p14:cNvPr>
+                <p14:cNvContentPartPr/>
+                <p14:nvPr/>
+              </p14:nvContentPartPr>
+              <p14:xfrm>
+                <a:off x="9345113" y="5354155"/>
+                <a:ext cx="378000" cy="103680"/>
+              </p14:xfrm>
+            </p:contentPart>
+          </mc:Choice>
+          <mc:Fallback>
+            <p:pic>
+              <p:nvPicPr>
+                <p:cNvPr id="9" name="Ink 8">
+                  <a:extLst>
+                    <a:ext uri="{FF2B5EF4-FFF2-40B4-BE49-F238E27FC236}">
+                      <a16:creationId xmlns:a16="http://schemas.microsoft.com/office/drawing/2014/main" id="{B7D0ED90-E418-70AD-25D1-BCD295A436CC}"/>
+                    </a:ext>
+                  </a:extLst>
+                </p:cNvPr>
+                <p:cNvPicPr/>
+                <p:nvPr/>
+              </p:nvPicPr>
+              <p:blipFill>
+                <a:blip r:embed="rId39"/>
+                <a:stretch>
+                  <a:fillRect/>
+                </a:stretch>
+              </p:blipFill>
+              <p:spPr>
+                <a:xfrm>
+                  <a:off x="9338993" y="5348035"/>
+                  <a:ext cx="390240" cy="115920"/>
+                </a:xfrm>
+                <a:prstGeom prst="rect">
+                  <a:avLst/>
+                </a:prstGeom>
+              </p:spPr>
+            </p:pic>
+          </mc:Fallback>
+        </mc:AlternateContent>
+        <mc:AlternateContent xmlns:mc="http://schemas.openxmlformats.org/markup-compatibility/2006">
+          <mc:Choice xmlns:p14="http://schemas.microsoft.com/office/powerpoint/2010/main" Requires="p14">
+            <p:contentPart p14:bwMode="auto" r:id="rId40">
+              <p14:nvContentPartPr>
+                <p14:cNvPr id="12" name="Ink 11">
+                  <a:extLst>
+                    <a:ext uri="{FF2B5EF4-FFF2-40B4-BE49-F238E27FC236}">
+                      <a16:creationId xmlns:a16="http://schemas.microsoft.com/office/drawing/2014/main" id="{150E19EE-2B85-B8CB-8913-9BFDD2101D74}"/>
+                    </a:ext>
+                  </a:extLst>
+                </p14:cNvPr>
+                <p14:cNvContentPartPr/>
+                <p14:nvPr/>
+              </p14:nvContentPartPr>
+              <p14:xfrm>
+                <a:off x="4709753" y="3280915"/>
+                <a:ext cx="364680" cy="157320"/>
+              </p14:xfrm>
+            </p:contentPart>
+          </mc:Choice>
+          <mc:Fallback>
+            <p:pic>
+              <p:nvPicPr>
+                <p:cNvPr id="12" name="Ink 11">
+                  <a:extLst>
+                    <a:ext uri="{FF2B5EF4-FFF2-40B4-BE49-F238E27FC236}">
+                      <a16:creationId xmlns:a16="http://schemas.microsoft.com/office/drawing/2014/main" id="{150E19EE-2B85-B8CB-8913-9BFDD2101D74}"/>
+                    </a:ext>
+                  </a:extLst>
+                </p:cNvPr>
+                <p:cNvPicPr/>
+                <p:nvPr/>
+              </p:nvPicPr>
+              <p:blipFill>
+                <a:blip r:embed="rId41"/>
+                <a:stretch>
+                  <a:fillRect/>
+                </a:stretch>
+              </p:blipFill>
+              <p:spPr>
+                <a:xfrm>
+                  <a:off x="4703633" y="3274795"/>
+                  <a:ext cx="376920" cy="169560"/>
+                </a:xfrm>
+                <a:prstGeom prst="rect">
+                  <a:avLst/>
+                </a:prstGeom>
+              </p:spPr>
+            </p:pic>
+          </mc:Fallback>
+        </mc:AlternateContent>
+        <mc:AlternateContent xmlns:mc="http://schemas.openxmlformats.org/markup-compatibility/2006">
+          <mc:Choice xmlns:p14="http://schemas.microsoft.com/office/powerpoint/2010/main" Requires="p14">
+            <p:contentPart p14:bwMode="auto" r:id="rId42">
+              <p14:nvContentPartPr>
+                <p14:cNvPr id="13" name="Ink 12">
+                  <a:extLst>
+                    <a:ext uri="{FF2B5EF4-FFF2-40B4-BE49-F238E27FC236}">
+                      <a16:creationId xmlns:a16="http://schemas.microsoft.com/office/drawing/2014/main" id="{D9458BC4-47E7-4911-2D78-A5C5EB6E58FC}"/>
+                    </a:ext>
+                  </a:extLst>
+                </p14:cNvPr>
+                <p14:cNvContentPartPr/>
+                <p14:nvPr/>
+              </p14:nvContentPartPr>
+              <p14:xfrm>
+                <a:off x="5175953" y="3347155"/>
+                <a:ext cx="360" cy="86040"/>
+              </p14:xfrm>
+            </p:contentPart>
+          </mc:Choice>
+          <mc:Fallback>
+            <p:pic>
+              <p:nvPicPr>
+                <p:cNvPr id="13" name="Ink 12">
+                  <a:extLst>
+                    <a:ext uri="{FF2B5EF4-FFF2-40B4-BE49-F238E27FC236}">
+                      <a16:creationId xmlns:a16="http://schemas.microsoft.com/office/drawing/2014/main" id="{D9458BC4-47E7-4911-2D78-A5C5EB6E58FC}"/>
+                    </a:ext>
+                  </a:extLst>
+                </p:cNvPr>
+                <p:cNvPicPr/>
+                <p:nvPr/>
+              </p:nvPicPr>
+              <p:blipFill>
+                <a:blip r:embed="rId43"/>
+                <a:stretch>
+                  <a:fillRect/>
+                </a:stretch>
+              </p:blipFill>
+              <p:spPr>
+                <a:xfrm>
+                  <a:off x="5169833" y="3341035"/>
+                  <a:ext cx="12600" cy="98280"/>
+                </a:xfrm>
+                <a:prstGeom prst="rect">
+                  <a:avLst/>
+                </a:prstGeom>
+              </p:spPr>
+            </p:pic>
+          </mc:Fallback>
+        </mc:AlternateContent>
+        <mc:AlternateContent xmlns:mc="http://schemas.openxmlformats.org/markup-compatibility/2006">
+          <mc:Choice xmlns:p14="http://schemas.microsoft.com/office/powerpoint/2010/main" Requires="p14">
+            <p:contentPart p14:bwMode="auto" r:id="rId44">
+              <p14:nvContentPartPr>
+                <p14:cNvPr id="15" name="Ink 14">
+                  <a:extLst>
+                    <a:ext uri="{FF2B5EF4-FFF2-40B4-BE49-F238E27FC236}">
+                      <a16:creationId xmlns:a16="http://schemas.microsoft.com/office/drawing/2014/main" id="{FA102C44-E1A2-D531-CC21-66185AAF2B3C}"/>
+                    </a:ext>
+                  </a:extLst>
+                </p14:cNvPr>
+                <p14:cNvContentPartPr/>
+                <p14:nvPr/>
+              </p14:nvContentPartPr>
+              <p14:xfrm>
+                <a:off x="5296193" y="3317275"/>
+                <a:ext cx="144360" cy="225720"/>
+              </p14:xfrm>
+            </p:contentPart>
+          </mc:Choice>
+          <mc:Fallback>
+            <p:pic>
+              <p:nvPicPr>
+                <p:cNvPr id="15" name="Ink 14">
+                  <a:extLst>
+                    <a:ext uri="{FF2B5EF4-FFF2-40B4-BE49-F238E27FC236}">
+                      <a16:creationId xmlns:a16="http://schemas.microsoft.com/office/drawing/2014/main" id="{FA102C44-E1A2-D531-CC21-66185AAF2B3C}"/>
+                    </a:ext>
+                  </a:extLst>
+                </p:cNvPr>
+                <p:cNvPicPr/>
+                <p:nvPr/>
+              </p:nvPicPr>
+              <p:blipFill>
+                <a:blip r:embed="rId45"/>
+                <a:stretch>
+                  <a:fillRect/>
+                </a:stretch>
+              </p:blipFill>
+              <p:spPr>
+                <a:xfrm>
+                  <a:off x="5290073" y="3311155"/>
+                  <a:ext cx="156600" cy="237960"/>
+                </a:xfrm>
+                <a:prstGeom prst="rect">
+                  <a:avLst/>
+                </a:prstGeom>
+              </p:spPr>
+            </p:pic>
+          </mc:Fallback>
+        </mc:AlternateContent>
+        <mc:AlternateContent xmlns:mc="http://schemas.openxmlformats.org/markup-compatibility/2006">
+          <mc:Choice xmlns:p14="http://schemas.microsoft.com/office/powerpoint/2010/main" Requires="p14">
+            <p:contentPart p14:bwMode="auto" r:id="rId46">
+              <p14:nvContentPartPr>
+                <p14:cNvPr id="38" name="Ink 37">
+                  <a:extLst>
+                    <a:ext uri="{FF2B5EF4-FFF2-40B4-BE49-F238E27FC236}">
+                      <a16:creationId xmlns:a16="http://schemas.microsoft.com/office/drawing/2014/main" id="{571816B2-8F2B-8FD8-C901-56B2C24B3F7D}"/>
+                    </a:ext>
+                  </a:extLst>
+                </p14:cNvPr>
+                <p14:cNvContentPartPr/>
+                <p14:nvPr/>
+              </p14:nvContentPartPr>
+              <p14:xfrm>
+                <a:off x="4278473" y="1903555"/>
+                <a:ext cx="2622240" cy="2720160"/>
+              </p14:xfrm>
+            </p:contentPart>
+          </mc:Choice>
+          <mc:Fallback>
+            <p:pic>
+              <p:nvPicPr>
+                <p:cNvPr id="38" name="Ink 37">
+                  <a:extLst>
+                    <a:ext uri="{FF2B5EF4-FFF2-40B4-BE49-F238E27FC236}">
+                      <a16:creationId xmlns:a16="http://schemas.microsoft.com/office/drawing/2014/main" id="{571816B2-8F2B-8FD8-C901-56B2C24B3F7D}"/>
+                    </a:ext>
+                  </a:extLst>
+                </p:cNvPr>
+                <p:cNvPicPr/>
+                <p:nvPr/>
+              </p:nvPicPr>
+              <p:blipFill>
+                <a:blip r:embed="rId47"/>
+                <a:stretch>
+                  <a:fillRect/>
+                </a:stretch>
+              </p:blipFill>
+              <p:spPr>
+                <a:xfrm>
+                  <a:off x="4272353" y="1897435"/>
+                  <a:ext cx="2634480" cy="2732400"/>
+                </a:xfrm>
+                <a:prstGeom prst="rect">
+                  <a:avLst/>
+                </a:prstGeom>
+              </p:spPr>
+            </p:pic>
+          </mc:Fallback>
+        </mc:AlternateContent>
+      </p:grpSp>
+    </p:spTree>
+    <p:extLst>
+      <p:ext uri="{BB962C8B-B14F-4D97-AF65-F5344CB8AC3E}">
+        <p14:creationId xmlns:p14="http://schemas.microsoft.com/office/powerpoint/2010/main" val="3077550755"/>
+      </p:ext>
+    </p:extLst>
+  </p:cSld>
+  <p:clrMapOvr>
+    <a:masterClrMapping/>
+  </p:clrMapOvr>
+</p:sld>
+</file>
+
+<file path=ppt/slides/slide22.xml><?xml version="1.0" encoding="utf-8"?>
+<p:sld xmlns:a="http://schemas.openxmlformats.org/drawingml/2006/main" xmlns:r="http://schemas.openxmlformats.org/officeDocument/2006/relationships" xmlns:p="http://schemas.openxmlformats.org/presentationml/2006/main">
+  <p:cSld>
+    <p:spTree>
+      <p:nvGrpSpPr>
+        <p:cNvPr id="1" name="">
+          <a:extLst>
+            <a:ext uri="{FF2B5EF4-FFF2-40B4-BE49-F238E27FC236}">
+              <a16:creationId xmlns:a16="http://schemas.microsoft.com/office/drawing/2014/main" id="{6858D721-BC90-527B-B218-7F92705EBC34}"/>
+            </a:ext>
+          </a:extLst>
+        </p:cNvPr>
+        <p:cNvGrpSpPr/>
+        <p:nvPr/>
+      </p:nvGrpSpPr>
+      <p:grpSpPr>
+        <a:xfrm>
+          <a:off x="0" y="0"/>
+          <a:ext cx="0" cy="0"/>
+          <a:chOff x="0" y="0"/>
+          <a:chExt cx="0" cy="0"/>
+        </a:xfrm>
+      </p:grpSpPr>
+      <mc:AlternateContent xmlns:mc="http://schemas.openxmlformats.org/markup-compatibility/2006">
+        <mc:Choice xmlns:p14="http://schemas.microsoft.com/office/powerpoint/2010/main" Requires="p14">
+          <p:contentPart p14:bwMode="auto" r:id="rId2">
+            <p14:nvContentPartPr>
+              <p14:cNvPr id="2" name="Ink 1">
+                <a:extLst>
+                  <a:ext uri="{FF2B5EF4-FFF2-40B4-BE49-F238E27FC236}">
+                    <a16:creationId xmlns:a16="http://schemas.microsoft.com/office/drawing/2014/main" id="{576D83C1-041F-8E86-C2B8-4F25080F984E}"/>
+                  </a:ext>
+                </a:extLst>
+              </p14:cNvPr>
+              <p14:cNvContentPartPr/>
+              <p14:nvPr/>
+            </p14:nvContentPartPr>
+            <p14:xfrm>
+              <a:off x="2735153" y="590923"/>
+              <a:ext cx="5724720" cy="4867920"/>
+            </p14:xfrm>
+          </p:contentPart>
+        </mc:Choice>
+        <mc:Fallback>
+          <p:pic>
+            <p:nvPicPr>
+              <p:cNvPr id="2" name="Ink 1">
+                <a:extLst>
+                  <a:ext uri="{FF2B5EF4-FFF2-40B4-BE49-F238E27FC236}">
+                    <a16:creationId xmlns:a16="http://schemas.microsoft.com/office/drawing/2014/main" id="{576D83C1-041F-8E86-C2B8-4F25080F984E}"/>
+                  </a:ext>
+                </a:extLst>
+              </p:cNvPr>
+              <p:cNvPicPr/>
+              <p:nvPr/>
+            </p:nvPicPr>
+            <p:blipFill>
+              <a:blip r:embed="rId3"/>
+              <a:stretch>
+                <a:fillRect/>
+              </a:stretch>
+            </p:blipFill>
+            <p:spPr>
+              <a:xfrm>
+                <a:off x="2729033" y="584803"/>
+                <a:ext cx="5736960" cy="4880160"/>
+              </a:xfrm>
+              <a:prstGeom prst="rect">
+                <a:avLst/>
+              </a:prstGeom>
+            </p:spPr>
+          </p:pic>
+        </mc:Fallback>
+      </mc:AlternateContent>
+      <mc:AlternateContent xmlns:mc="http://schemas.openxmlformats.org/markup-compatibility/2006">
+        <mc:Choice xmlns:p14="http://schemas.microsoft.com/office/powerpoint/2010/main" Requires="p14">
+          <p:contentPart p14:bwMode="auto" r:id="rId4">
+            <p14:nvContentPartPr>
+              <p14:cNvPr id="3" name="Ink 2">
+                <a:extLst>
+                  <a:ext uri="{FF2B5EF4-FFF2-40B4-BE49-F238E27FC236}">
+                    <a16:creationId xmlns:a16="http://schemas.microsoft.com/office/drawing/2014/main" id="{3EDECD57-BCCF-75E6-AA10-B83CF9656FCD}"/>
+                  </a:ext>
+                </a:extLst>
+              </p14:cNvPr>
+              <p14:cNvContentPartPr/>
+              <p14:nvPr/>
+            </p14:nvContentPartPr>
+            <p14:xfrm>
+              <a:off x="3214313" y="1796203"/>
+              <a:ext cx="679680" cy="872640"/>
+            </p14:xfrm>
+          </p:contentPart>
+        </mc:Choice>
+        <mc:Fallback>
+          <p:pic>
+            <p:nvPicPr>
+              <p:cNvPr id="3" name="Ink 2">
+                <a:extLst>
+                  <a:ext uri="{FF2B5EF4-FFF2-40B4-BE49-F238E27FC236}">
+                    <a16:creationId xmlns:a16="http://schemas.microsoft.com/office/drawing/2014/main" id="{3EDECD57-BCCF-75E6-AA10-B83CF9656FCD}"/>
+                  </a:ext>
+                </a:extLst>
+              </p:cNvPr>
+              <p:cNvPicPr/>
+              <p:nvPr/>
+            </p:nvPicPr>
+            <p:blipFill>
+              <a:blip r:embed="rId5"/>
+              <a:stretch>
+                <a:fillRect/>
+              </a:stretch>
+            </p:blipFill>
+            <p:spPr>
+              <a:xfrm>
+                <a:off x="3208193" y="1790083"/>
+                <a:ext cx="691920" cy="884880"/>
+              </a:xfrm>
+              <a:prstGeom prst="rect">
+                <a:avLst/>
+              </a:prstGeom>
+            </p:spPr>
+          </p:pic>
+        </mc:Fallback>
+      </mc:AlternateContent>
+      <mc:AlternateContent xmlns:mc="http://schemas.openxmlformats.org/markup-compatibility/2006">
+        <mc:Choice xmlns:p14="http://schemas.microsoft.com/office/powerpoint/2010/main" Requires="p14">
+          <p:contentPart p14:bwMode="auto" r:id="rId6">
+            <p14:nvContentPartPr>
+              <p14:cNvPr id="6" name="Ink 5">
+                <a:extLst>
+                  <a:ext uri="{FF2B5EF4-FFF2-40B4-BE49-F238E27FC236}">
+                    <a16:creationId xmlns:a16="http://schemas.microsoft.com/office/drawing/2014/main" id="{B6E81C60-3D91-A3C2-CF49-6A952B508D5B}"/>
+                  </a:ext>
+                </a:extLst>
+              </p14:cNvPr>
+              <p14:cNvContentPartPr/>
+              <p14:nvPr/>
+            </p14:nvContentPartPr>
+            <p14:xfrm>
+              <a:off x="7614233" y="1977283"/>
+              <a:ext cx="536400" cy="1185480"/>
+            </p14:xfrm>
+          </p:contentPart>
+        </mc:Choice>
+        <mc:Fallback>
+          <p:pic>
+            <p:nvPicPr>
+              <p:cNvPr id="6" name="Ink 5">
+                <a:extLst>
+                  <a:ext uri="{FF2B5EF4-FFF2-40B4-BE49-F238E27FC236}">
+                    <a16:creationId xmlns:a16="http://schemas.microsoft.com/office/drawing/2014/main" id="{B6E81C60-3D91-A3C2-CF49-6A952B508D5B}"/>
+                  </a:ext>
+                </a:extLst>
+              </p:cNvPr>
+              <p:cNvPicPr/>
+              <p:nvPr/>
+            </p:nvPicPr>
+            <p:blipFill>
+              <a:blip r:embed="rId7"/>
+              <a:stretch>
+                <a:fillRect/>
+              </a:stretch>
+            </p:blipFill>
+            <p:spPr>
+              <a:xfrm>
+                <a:off x="7608113" y="1971163"/>
+                <a:ext cx="548640" cy="1197720"/>
+              </a:xfrm>
+              <a:prstGeom prst="rect">
+                <a:avLst/>
+              </a:prstGeom>
+            </p:spPr>
+          </p:pic>
+        </mc:Fallback>
+      </mc:AlternateContent>
+      <p:grpSp>
+        <p:nvGrpSpPr>
+          <p:cNvPr id="16" name="Group 15">
+            <a:extLst>
+              <a:ext uri="{FF2B5EF4-FFF2-40B4-BE49-F238E27FC236}">
+                <a16:creationId xmlns:a16="http://schemas.microsoft.com/office/drawing/2014/main" id="{5FF63C59-0F7D-418C-9132-2456737C51B9}"/>
+              </a:ext>
+            </a:extLst>
+          </p:cNvPr>
+          <p:cNvGrpSpPr/>
+          <p:nvPr/>
+        </p:nvGrpSpPr>
+        <p:grpSpPr>
+          <a:xfrm>
+            <a:off x="5124113" y="5665483"/>
+            <a:ext cx="339840" cy="736560"/>
+            <a:chOff x="5124113" y="5665483"/>
+            <a:chExt cx="339840" cy="736560"/>
+          </a:xfrm>
+        </p:grpSpPr>
+        <mc:AlternateContent xmlns:mc="http://schemas.openxmlformats.org/markup-compatibility/2006">
+          <mc:Choice xmlns:p14="http://schemas.microsoft.com/office/powerpoint/2010/main" Requires="p14">
+            <p:contentPart p14:bwMode="auto" r:id="rId8">
+              <p14:nvContentPartPr>
+                <p14:cNvPr id="10" name="Ink 9">
+                  <a:extLst>
+                    <a:ext uri="{FF2B5EF4-FFF2-40B4-BE49-F238E27FC236}">
+                      <a16:creationId xmlns:a16="http://schemas.microsoft.com/office/drawing/2014/main" id="{FAF41223-4C41-18BB-B646-3B103734BCD7}"/>
+                    </a:ext>
+                  </a:extLst>
+                </p14:cNvPr>
+                <p14:cNvContentPartPr/>
+                <p14:nvPr/>
+              </p14:nvContentPartPr>
+              <p14:xfrm>
+                <a:off x="5124113" y="5665483"/>
+                <a:ext cx="339840" cy="736560"/>
+              </p14:xfrm>
+            </p:contentPart>
+          </mc:Choice>
+          <mc:Fallback>
+            <p:pic>
+              <p:nvPicPr>
+                <p:cNvPr id="10" name="Ink 9">
+                  <a:extLst>
+                    <a:ext uri="{FF2B5EF4-FFF2-40B4-BE49-F238E27FC236}">
+                      <a16:creationId xmlns:a16="http://schemas.microsoft.com/office/drawing/2014/main" id="{FAF41223-4C41-18BB-B646-3B103734BCD7}"/>
+                    </a:ext>
+                  </a:extLst>
+                </p:cNvPr>
+                <p:cNvPicPr/>
+                <p:nvPr/>
+              </p:nvPicPr>
+              <p:blipFill>
+                <a:blip r:embed="rId9"/>
+                <a:stretch>
+                  <a:fillRect/>
+                </a:stretch>
+              </p:blipFill>
+              <p:spPr>
+                <a:xfrm>
+                  <a:off x="5117993" y="5659363"/>
+                  <a:ext cx="352080" cy="748800"/>
+                </a:xfrm>
+                <a:prstGeom prst="rect">
+                  <a:avLst/>
+                </a:prstGeom>
+              </p:spPr>
+            </p:pic>
+          </mc:Fallback>
+        </mc:AlternateContent>
+        <mc:AlternateContent xmlns:mc="http://schemas.openxmlformats.org/markup-compatibility/2006">
+          <mc:Choice xmlns:p14="http://schemas.microsoft.com/office/powerpoint/2010/main" Requires="p14">
+            <p:contentPart p14:bwMode="auto" r:id="rId10">
+              <p14:nvContentPartPr>
+                <p14:cNvPr id="14" name="Ink 13">
+                  <a:extLst>
+                    <a:ext uri="{FF2B5EF4-FFF2-40B4-BE49-F238E27FC236}">
+                      <a16:creationId xmlns:a16="http://schemas.microsoft.com/office/drawing/2014/main" id="{23F6725D-5A62-5AFD-B151-9B0A055B774B}"/>
+                    </a:ext>
+                  </a:extLst>
+                </p14:cNvPr>
+                <p14:cNvContentPartPr/>
+                <p14:nvPr/>
+              </p14:nvContentPartPr>
+              <p14:xfrm>
+                <a:off x="5210153" y="5980843"/>
+                <a:ext cx="188640" cy="29520"/>
+              </p14:xfrm>
+            </p:contentPart>
+          </mc:Choice>
+          <mc:Fallback>
+            <p:pic>
+              <p:nvPicPr>
+                <p:cNvPr id="14" name="Ink 13">
+                  <a:extLst>
+                    <a:ext uri="{FF2B5EF4-FFF2-40B4-BE49-F238E27FC236}">
+                      <a16:creationId xmlns:a16="http://schemas.microsoft.com/office/drawing/2014/main" id="{23F6725D-5A62-5AFD-B151-9B0A055B774B}"/>
+                    </a:ext>
+                  </a:extLst>
+                </p:cNvPr>
+                <p:cNvPicPr/>
+                <p:nvPr/>
+              </p:nvPicPr>
+              <p:blipFill>
+                <a:blip r:embed="rId11"/>
+                <a:stretch>
+                  <a:fillRect/>
+                </a:stretch>
+              </p:blipFill>
+              <p:spPr>
+                <a:xfrm>
+                  <a:off x="5204033" y="5974723"/>
+                  <a:ext cx="200880" cy="41760"/>
+                </a:xfrm>
+                <a:prstGeom prst="rect">
+                  <a:avLst/>
+                </a:prstGeom>
+              </p:spPr>
+            </p:pic>
+          </mc:Fallback>
+        </mc:AlternateContent>
+      </p:grpSp>
+    </p:spTree>
+    <p:extLst>
+      <p:ext uri="{BB962C8B-B14F-4D97-AF65-F5344CB8AC3E}">
+        <p14:creationId xmlns:p14="http://schemas.microsoft.com/office/powerpoint/2010/main" val="436402676"/>
       </p:ext>
     </p:extLst>
   </p:cSld>
